--- a/docs/นำเสนอ100_HabitTracker.pptx
+++ b/docs/นำเสนอ100_HabitTracker.pptx
@@ -26,6 +26,7 @@
     <p:sldId id="271" r:id="rId22"/>
     <p:sldId id="272" r:id="rId23"/>
     <p:sldId id="273" r:id="rId24"/>
+    <p:sldId id="274" r:id="rId25"/>
   </p:sldIdLst>
   <p:sldSz cx="12192000" cy="6858000"/>
   <p:notesSz cx="6858000" cy="12192000"/>
@@ -1325,7 +1326,7 @@
                 </a:solidFill>
                 <a:latin typeface="Noto Looped Thai"/>
               </a:rPr>
-              <a:t>ติดตั้งจริงด้วยไฟล์ APK · ทดสอบอัตโนมัติผ่าน 105 กรณี · ระบบสมาชิกและกระดานอันดับบนคลาวด์  ·  วิทยาลัยเทคนิคเชียงใหม่</a:t>
+              <a:t>ติดตั้งจริงด้วยไฟล์ APK · ทดสอบอัตโนมัติผ่าน 120 กรณี · ระบบสมาชิกและกระดานอันดับบนคลาวด์  ·  วิทยาลัยเทคนิคเชียงใหม่</a:t>
             </a:r>
           </a:p>
         </p:txBody>
@@ -1799,7 +1800,7 @@
                 </a:solidFill>
                 <a:latin typeface="Noto Looped Thai"/>
               </a:rPr>
-              <a:t>ติ๊กรายวัน · ค่าตัวเลข</a:t>
+              <a:t>ตราแรงค์ · ติ๊กรายวัน</a:t>
             </a:r>
           </a:p>
         </p:txBody>
@@ -1852,7 +1853,7 @@
       </p:sp>
       <p:pic>
         <p:nvPicPr>
-          <p:cNvPr id="14" name="Picture 13" descr="08_menu.png"/>
+          <p:cNvPr id="14" name="Picture 13" descr="10_scale.png"/>
           <p:cNvPicPr>
             <a:picLocks noChangeAspect="1"/>
           </p:cNvPicPr>
@@ -1911,7 +1912,7 @@
                 </a:solidFill>
                 <a:latin typeface="Noto Looped Thai"/>
               </a:rPr>
-              <a:t>เมนูกดค้าง</a:t>
+              <a:t>จิตใจ 3 ระดับ</a:t>
             </a:r>
           </a:p>
         </p:txBody>
@@ -1953,7 +1954,7 @@
                 </a:solidFill>
                 <a:latin typeface="Noto Looped Thai"/>
               </a:rPr>
-              <a:t>แก้ไข · พักไว้ · ลบถาวร</a:t>
+              <a:t>น้อย · ปานกลาง · มาก</a:t>
             </a:r>
           </a:p>
         </p:txBody>
@@ -2006,7 +2007,7 @@
       </p:sp>
       <p:pic>
         <p:nvPicPr>
-          <p:cNvPr id="18" name="Picture 17" descr="02_analytics.png"/>
+          <p:cNvPr id="18" name="Picture 17" descr="11_popup.png"/>
           <p:cNvPicPr>
             <a:picLocks noChangeAspect="1"/>
           </p:cNvPicPr>
@@ -2065,7 +2066,7 @@
                 </a:solidFill>
                 <a:latin typeface="Noto Looped Thai"/>
               </a:rPr>
-              <a:t>สถิติ</a:t>
+              <a:t>popup ได้คะแนน</a:t>
             </a:r>
           </a:p>
         </p:txBody>
@@ -2107,7 +2108,7 @@
                 </a:solidFill>
                 <a:latin typeface="Noto Looped Thai"/>
               </a:rPr>
-              <a:t>Streak · ปฏิทิน 1 ปี</a:t>
+              <a:t>+แต้ม · ตัวคูณต่อเนื่อง</a:t>
             </a:r>
           </a:p>
         </p:txBody>
@@ -2160,7 +2161,7 @@
       </p:sp>
       <p:pic>
         <p:nvPicPr>
-          <p:cNvPr id="22" name="Picture 21" descr="04_add_habit.png"/>
+          <p:cNvPr id="22" name="Picture 21" descr="02_analytics.png"/>
           <p:cNvPicPr>
             <a:picLocks noChangeAspect="1"/>
           </p:cNvPicPr>
@@ -2219,7 +2220,7 @@
                 </a:solidFill>
                 <a:latin typeface="Noto Looped Thai"/>
               </a:rPr>
-              <a:t>เพิ่ม habit</a:t>
+              <a:t>หลอดคะแนน</a:t>
             </a:r>
           </a:p>
         </p:txBody>
@@ -2261,7 +2262,7 @@
                 </a:solidFill>
                 <a:latin typeface="Noto Looped Thai"/>
               </a:rPr>
-              <a:t>ความถี่ · เวลาเตือน</a:t>
+              <a:t>รวม + แยก 4 ด้าน</a:t>
             </a:r>
           </a:p>
         </p:txBody>
@@ -2373,7 +2374,7 @@
                 </a:solidFill>
                 <a:latin typeface="Noto Looped Thai"/>
               </a:rPr>
-              <a:t>แม่แบบ 18 รายการ</a:t>
+              <a:t>แม่แบบ 16 รายการ</a:t>
             </a:r>
           </a:p>
         </p:txBody>
@@ -2415,7 +2416,7 @@
                 </a:solidFill>
                 <a:latin typeface="Noto Looped Thai"/>
               </a:rPr>
-              <a:t>เลือกแล้วใช้ได้ทันที</a:t>
+              <a:t>4 หมวด เลือกแล้วใช้ได้เลย</a:t>
             </a:r>
           </a:p>
         </p:txBody>
@@ -2468,7 +2469,7 @@
       </p:sp>
       <p:pic>
         <p:nvPicPr>
-          <p:cNvPr id="30" name="Picture 29" descr="09_manage.png"/>
+          <p:cNvPr id="30" name="Picture 29" descr="08_menu.png"/>
           <p:cNvPicPr>
             <a:picLocks noChangeAspect="1"/>
           </p:cNvPicPr>
@@ -2527,7 +2528,7 @@
                 </a:solidFill>
                 <a:latin typeface="Noto Looped Thai"/>
               </a:rPr>
-              <a:t>จัดการ habit</a:t>
+              <a:t>เมนูกดค้าง</a:t>
             </a:r>
           </a:p>
         </p:txBody>
@@ -2569,7 +2570,7 @@
                 </a:solidFill>
                 <a:latin typeface="Noto Looped Thai"/>
               </a:rPr>
-              <a:t>รายการที่พักไว้ · เลิกพัก</a:t>
+              <a:t>แก้ไข · พักไว้ · ลบถาวร</a:t>
             </a:r>
           </a:p>
         </p:txBody>
@@ -3512,7 +3513,7 @@
                 </a:solidFill>
                 <a:latin typeface="Noto Looped Thai"/>
               </a:rPr>
-              <a:t>ดูสถิติ</a:t>
+              <a:t>ได้คะแนน</a:t>
             </a:r>
           </a:p>
         </p:txBody>
@@ -3554,7 +3555,7 @@
                 </a:solidFill>
                 <a:latin typeface="Noto Looped Thai"/>
               </a:rPr>
-              <a:t>เปิดหน้าสถิติ → Streak ปัจจุบัน/สูงสุด → ปฏิทิน 1 ปี → กราฟรายสัปดาห์</a:t>
+              <a:t>ติ๊กให้ครบ 4 ด้าน → popup เด้งบอกแต้มและตัวคูณ → เปิดหน้าสถิติดูหลอดคะแนน</a:t>
             </a:r>
           </a:p>
         </p:txBody>
@@ -5961,7 +5962,7 @@
                           </a:solidFill>
                           <a:latin typeface="Noto Looped Thai"/>
                         </a:rPr>
-                        <a:t>105 / 105</a:t>
+                        <a:t>120 / 120</a:t>
                       </a:r>
                     </a:p>
                   </a:txBody>
@@ -6841,7 +6842,7 @@
                           </a:solidFill>
                           <a:latin typeface="Noto Looped Thai"/>
                         </a:rPr>
-                        <a:t>63.8 MB</a:t>
+                        <a:t>64.0 MB</a:t>
                       </a:r>
                     </a:p>
                   </a:txBody>
@@ -7071,7 +7072,7 @@
                 </a:solidFill>
                 <a:latin typeface="Noto Looped Thai"/>
               </a:rPr>
-              <a:t>• ชุดทดสอบในโค้ด 12 ไฟล์ 1,500 บรรทัด สั่งรันด้วย flutter test</a:t>
+              <a:t>• ชุดทดสอบในโค้ด 14 ไฟล์ 1,717 บรรทัด สั่งรันด้วย flutter test</a:t>
             </a:r>
           </a:p>
           <a:p>
@@ -8345,7 +8346,7 @@
                 </a:solidFill>
                 <a:latin typeface="Noto Looped Thai"/>
               </a:rPr>
-              <a:t>ส่วนที่กำลังพัฒนาต่อ และข้อจำกัดที่ยังเหลือ</a:t>
+              <a:t>ระบบคะแนนแรงค์ตามความต่อเนื่อง</a:t>
             </a:r>
           </a:p>
         </p:txBody>
@@ -8387,7 +8388,7 @@
                 </a:solidFill>
                 <a:latin typeface="Noto Looped Thai"/>
               </a:rPr>
-              <a:t>แยกให้ชัดว่าอะไรเสร็จแล้ว และอะไรยังไม่เสร็จ ไม่เคลมเกินของจริง</a:t>
+              <a:t>ทำครบทั้ง 4 ด้านต่อวันได้อย่างน้อย 40 คะแนน ยิ่งทำติดกันยิ่งได้ตัวคูณ ไม่ทำโดนหัก</a:t>
             </a:r>
           </a:p>
         </p:txBody>
@@ -8517,21 +8518,798 @@
                 </a:solidFill>
                 <a:latin typeface="Noto Looped Thai"/>
               </a:rPr>
-              <a:t>ยังไม่เสร็จ พูดตรง</a:t>
-            </a:r>
-          </a:p>
-        </p:txBody>
-      </p:sp>
-      <p:sp>
-        <p:nvSpPr>
-          <p:cNvPr id="9" name="Rounded Rectangle 8"/>
+              <a:t>คิดสดจากประวัติ ออฟไลน์ก็เห็น</a:t>
+            </a:r>
+          </a:p>
+        </p:txBody>
+      </p:sp>
+      <p:graphicFrame>
+        <p:nvGraphicFramePr>
+          <p:cNvPr id="9" name="Table 8"/>
+          <p:cNvGraphicFramePr>
+            <a:graphicFrameLocks noGrp="1"/>
+          </p:cNvGraphicFramePr>
+          <p:nvPr/>
+        </p:nvGraphicFramePr>
+        <p:xfrm>
+          <a:off x="640080" y="1298448"/>
+          <a:ext cx="5806440" cy="3218688"/>
+        </p:xfrm>
+        <a:graphic>
+          <a:graphicData uri="http://schemas.openxmlformats.org/drawingml/2006/table">
+            <a:tbl>
+              <a:tblPr firstRow="1" bandRow="1">
+                <a:tableStyleId>{5C22544A-7EE6-4342-B048-85BDC9FD1C3A}</a:tableStyleId>
+              </a:tblPr>
+              <a:tblGrid>
+                <a:gridCol w="4434840"/>
+                <a:gridCol w="1371600"/>
+              </a:tblGrid>
+              <a:tr h="402336">
+                <a:tc>
+                  <a:txBody>
+                    <a:bodyPr/>
+                    <a:lstStyle/>
+                    <a:p>
+                      <a:pPr>
+                        <a:lnSpc>
+                          <a:spcPct val="110000"/>
+                        </a:lnSpc>
+                      </a:pPr>
+                      <a:r>
+                        <a:rPr sz="1150" b="1">
+                          <a:solidFill>
+                            <a:srgbClr val="FFFFFF"/>
+                          </a:solidFill>
+                          <a:latin typeface="Noto Looped Thai"/>
+                        </a:rPr>
+                        <a:t>กติกา</a:t>
+                      </a:r>
+                    </a:p>
+                  </a:txBody>
+                  <a:tcPr marL="91440" marR="91440" marT="36576" marB="36576" anchor="ctr">
+                    <a:solidFill>
+                      <a:srgbClr val="0C2D48"/>
+                    </a:solidFill>
+                  </a:tcPr>
+                </a:tc>
+                <a:tc>
+                  <a:txBody>
+                    <a:bodyPr/>
+                    <a:lstStyle/>
+                    <a:p>
+                      <a:pPr>
+                        <a:lnSpc>
+                          <a:spcPct val="110000"/>
+                        </a:lnSpc>
+                      </a:pPr>
+                      <a:r>
+                        <a:rPr sz="1150" b="1">
+                          <a:solidFill>
+                            <a:srgbClr val="FFFFFF"/>
+                          </a:solidFill>
+                          <a:latin typeface="Noto Looped Thai"/>
+                        </a:rPr>
+                        <a:t>คะแนน</a:t>
+                      </a:r>
+                    </a:p>
+                  </a:txBody>
+                  <a:tcPr marL="91440" marR="91440" marT="36576" marB="36576" anchor="ctr">
+                    <a:solidFill>
+                      <a:srgbClr val="0C2D48"/>
+                    </a:solidFill>
+                  </a:tcPr>
+                </a:tc>
+              </a:tr>
+              <a:tr h="402336">
+                <a:tc>
+                  <a:txBody>
+                    <a:bodyPr/>
+                    <a:lstStyle/>
+                    <a:p>
+                      <a:pPr>
+                        <a:lnSpc>
+                          <a:spcPct val="110000"/>
+                        </a:lnSpc>
+                      </a:pPr>
+                      <a:r>
+                        <a:rPr sz="1050" b="0">
+                          <a:solidFill>
+                            <a:srgbClr val="1F2937"/>
+                          </a:solidFill>
+                          <a:latin typeface="Noto Looped Thai"/>
+                        </a:rPr>
+                        <a:t>ผ่าน 1 ด้านใน 1 วัน (ทำ habit ในด้านนั้นอย่างน้อย 1 อัน)</a:t>
+                      </a:r>
+                    </a:p>
+                  </a:txBody>
+                  <a:tcPr marL="91440" marR="91440" marT="36576" marB="36576" anchor="ctr">
+                    <a:solidFill>
+                      <a:srgbClr val="FFFFFF"/>
+                    </a:solidFill>
+                  </a:tcPr>
+                </a:tc>
+                <a:tc>
+                  <a:txBody>
+                    <a:bodyPr/>
+                    <a:lstStyle/>
+                    <a:p>
+                      <a:pPr>
+                        <a:lnSpc>
+                          <a:spcPct val="110000"/>
+                        </a:lnSpc>
+                      </a:pPr>
+                      <a:r>
+                        <a:rPr sz="1050" b="1">
+                          <a:solidFill>
+                            <a:srgbClr val="2F855A"/>
+                          </a:solidFill>
+                          <a:latin typeface="Noto Looped Thai"/>
+                        </a:rPr>
+                        <a:t>+10</a:t>
+                      </a:r>
+                    </a:p>
+                  </a:txBody>
+                  <a:tcPr marL="91440" marR="91440" marT="36576" marB="36576" anchor="ctr">
+                    <a:solidFill>
+                      <a:srgbClr val="FFFFFF"/>
+                    </a:solidFill>
+                  </a:tcPr>
+                </a:tc>
+              </a:tr>
+              <a:tr h="402336">
+                <a:tc>
+                  <a:txBody>
+                    <a:bodyPr/>
+                    <a:lstStyle/>
+                    <a:p>
+                      <a:pPr>
+                        <a:lnSpc>
+                          <a:spcPct val="110000"/>
+                        </a:lnSpc>
+                      </a:pPr>
+                      <a:r>
+                        <a:rPr sz="1050" b="0">
+                          <a:solidFill>
+                            <a:srgbClr val="1F2937"/>
+                          </a:solidFill>
+                          <a:latin typeface="Noto Looped Thai"/>
+                        </a:rPr>
+                        <a:t>ครบทั้ง 4 ด้าน ร่างกาย · กิน · นอน · จิตใจ</a:t>
+                      </a:r>
+                    </a:p>
+                  </a:txBody>
+                  <a:tcPr marL="91440" marR="91440" marT="36576" marB="36576" anchor="ctr">
+                    <a:solidFill>
+                      <a:srgbClr val="F4F7FA"/>
+                    </a:solidFill>
+                  </a:tcPr>
+                </a:tc>
+                <a:tc>
+                  <a:txBody>
+                    <a:bodyPr/>
+                    <a:lstStyle/>
+                    <a:p>
+                      <a:pPr>
+                        <a:lnSpc>
+                          <a:spcPct val="110000"/>
+                        </a:lnSpc>
+                      </a:pPr>
+                      <a:r>
+                        <a:rPr sz="1050" b="1">
+                          <a:solidFill>
+                            <a:srgbClr val="2F855A"/>
+                          </a:solidFill>
+                          <a:latin typeface="Noto Looped Thai"/>
+                        </a:rPr>
+                        <a:t>40 / วัน</a:t>
+                      </a:r>
+                    </a:p>
+                  </a:txBody>
+                  <a:tcPr marL="91440" marR="91440" marT="36576" marB="36576" anchor="ctr">
+                    <a:solidFill>
+                      <a:srgbClr val="F4F7FA"/>
+                    </a:solidFill>
+                  </a:tcPr>
+                </a:tc>
+              </a:tr>
+              <a:tr h="402336">
+                <a:tc>
+                  <a:txBody>
+                    <a:bodyPr/>
+                    <a:lstStyle/>
+                    <a:p>
+                      <a:pPr>
+                        <a:lnSpc>
+                          <a:spcPct val="110000"/>
+                        </a:lnSpc>
+                      </a:pPr>
+                      <a:r>
+                        <a:rPr sz="1050" b="0">
+                          <a:solidFill>
+                            <a:srgbClr val="1F2937"/>
+                          </a:solidFill>
+                          <a:latin typeface="Noto Looped Thai"/>
+                        </a:rPr>
+                        <a:t>ทำติดกัน 7–13 วัน</a:t>
+                      </a:r>
+                    </a:p>
+                  </a:txBody>
+                  <a:tcPr marL="91440" marR="91440" marT="36576" marB="36576" anchor="ctr">
+                    <a:solidFill>
+                      <a:srgbClr val="FFFFFF"/>
+                    </a:solidFill>
+                  </a:tcPr>
+                </a:tc>
+                <a:tc>
+                  <a:txBody>
+                    <a:bodyPr/>
+                    <a:lstStyle/>
+                    <a:p>
+                      <a:pPr>
+                        <a:lnSpc>
+                          <a:spcPct val="110000"/>
+                        </a:lnSpc>
+                      </a:pPr>
+                      <a:r>
+                        <a:rPr sz="1050" b="1">
+                          <a:solidFill>
+                            <a:srgbClr val="2E8B8B"/>
+                          </a:solidFill>
+                          <a:latin typeface="Noto Looped Thai"/>
+                        </a:rPr>
+                        <a:t>×1.25</a:t>
+                      </a:r>
+                    </a:p>
+                  </a:txBody>
+                  <a:tcPr marL="91440" marR="91440" marT="36576" marB="36576" anchor="ctr">
+                    <a:solidFill>
+                      <a:srgbClr val="FFFFFF"/>
+                    </a:solidFill>
+                  </a:tcPr>
+                </a:tc>
+              </a:tr>
+              <a:tr h="402336">
+                <a:tc>
+                  <a:txBody>
+                    <a:bodyPr/>
+                    <a:lstStyle/>
+                    <a:p>
+                      <a:pPr>
+                        <a:lnSpc>
+                          <a:spcPct val="110000"/>
+                        </a:lnSpc>
+                      </a:pPr>
+                      <a:r>
+                        <a:rPr sz="1050" b="0">
+                          <a:solidFill>
+                            <a:srgbClr val="1F2937"/>
+                          </a:solidFill>
+                          <a:latin typeface="Noto Looped Thai"/>
+                        </a:rPr>
+                        <a:t>ทำติดกัน 14–29 วัน</a:t>
+                      </a:r>
+                    </a:p>
+                  </a:txBody>
+                  <a:tcPr marL="91440" marR="91440" marT="36576" marB="36576" anchor="ctr">
+                    <a:solidFill>
+                      <a:srgbClr val="F4F7FA"/>
+                    </a:solidFill>
+                  </a:tcPr>
+                </a:tc>
+                <a:tc>
+                  <a:txBody>
+                    <a:bodyPr/>
+                    <a:lstStyle/>
+                    <a:p>
+                      <a:pPr>
+                        <a:lnSpc>
+                          <a:spcPct val="110000"/>
+                        </a:lnSpc>
+                      </a:pPr>
+                      <a:r>
+                        <a:rPr sz="1050" b="1">
+                          <a:solidFill>
+                            <a:srgbClr val="2E8B8B"/>
+                          </a:solidFill>
+                          <a:latin typeface="Noto Looped Thai"/>
+                        </a:rPr>
+                        <a:t>×1.5</a:t>
+                      </a:r>
+                    </a:p>
+                  </a:txBody>
+                  <a:tcPr marL="91440" marR="91440" marT="36576" marB="36576" anchor="ctr">
+                    <a:solidFill>
+                      <a:srgbClr val="F4F7FA"/>
+                    </a:solidFill>
+                  </a:tcPr>
+                </a:tc>
+              </a:tr>
+              <a:tr h="402336">
+                <a:tc>
+                  <a:txBody>
+                    <a:bodyPr/>
+                    <a:lstStyle/>
+                    <a:p>
+                      <a:pPr>
+                        <a:lnSpc>
+                          <a:spcPct val="110000"/>
+                        </a:lnSpc>
+                      </a:pPr>
+                      <a:r>
+                        <a:rPr sz="1050" b="0">
+                          <a:solidFill>
+                            <a:srgbClr val="1F2937"/>
+                          </a:solidFill>
+                          <a:latin typeface="Noto Looped Thai"/>
+                        </a:rPr>
+                        <a:t>ทำติดกัน 30 วันขึ้นไป</a:t>
+                      </a:r>
+                    </a:p>
+                  </a:txBody>
+                  <a:tcPr marL="91440" marR="91440" marT="36576" marB="36576" anchor="ctr">
+                    <a:solidFill>
+                      <a:srgbClr val="FFFFFF"/>
+                    </a:solidFill>
+                  </a:tcPr>
+                </a:tc>
+                <a:tc>
+                  <a:txBody>
+                    <a:bodyPr/>
+                    <a:lstStyle/>
+                    <a:p>
+                      <a:pPr>
+                        <a:lnSpc>
+                          <a:spcPct val="110000"/>
+                        </a:lnSpc>
+                      </a:pPr>
+                      <a:r>
+                        <a:rPr sz="1050" b="1">
+                          <a:solidFill>
+                            <a:srgbClr val="2E8B8B"/>
+                          </a:solidFill>
+                          <a:latin typeface="Noto Looped Thai"/>
+                        </a:rPr>
+                        <a:t>×2</a:t>
+                      </a:r>
+                    </a:p>
+                  </a:txBody>
+                  <a:tcPr marL="91440" marR="91440" marT="36576" marB="36576" anchor="ctr">
+                    <a:solidFill>
+                      <a:srgbClr val="FFFFFF"/>
+                    </a:solidFill>
+                  </a:tcPr>
+                </a:tc>
+              </a:tr>
+              <a:tr h="402336">
+                <a:tc>
+                  <a:txBody>
+                    <a:bodyPr/>
+                    <a:lstStyle/>
+                    <a:p>
+                      <a:pPr>
+                        <a:lnSpc>
+                          <a:spcPct val="110000"/>
+                        </a:lnSpc>
+                      </a:pPr>
+                      <a:r>
+                        <a:rPr sz="1050" b="0">
+                          <a:solidFill>
+                            <a:srgbClr val="1F2937"/>
+                          </a:solidFill>
+                          <a:latin typeface="Noto Looped Thai"/>
+                        </a:rPr>
+                        <a:t>วันไหนไม่ทำด้านนั้น (ตัวนับต่อเนื่องเริ่มใหม่)</a:t>
+                      </a:r>
+                    </a:p>
+                  </a:txBody>
+                  <a:tcPr marL="91440" marR="91440" marT="36576" marB="36576" anchor="ctr">
+                    <a:solidFill>
+                      <a:srgbClr val="F4F7FA"/>
+                    </a:solidFill>
+                  </a:tcPr>
+                </a:tc>
+                <a:tc>
+                  <a:txBody>
+                    <a:bodyPr/>
+                    <a:lstStyle/>
+                    <a:p>
+                      <a:pPr>
+                        <a:lnSpc>
+                          <a:spcPct val="110000"/>
+                        </a:lnSpc>
+                      </a:pPr>
+                      <a:r>
+                        <a:rPr sz="1050" b="1">
+                          <a:solidFill>
+                            <a:srgbClr val="C53030"/>
+                          </a:solidFill>
+                          <a:latin typeface="Noto Looped Thai"/>
+                        </a:rPr>
+                        <a:t>−5</a:t>
+                      </a:r>
+                    </a:p>
+                  </a:txBody>
+                  <a:tcPr marL="91440" marR="91440" marT="36576" marB="36576" anchor="ctr">
+                    <a:solidFill>
+                      <a:srgbClr val="F4F7FA"/>
+                    </a:solidFill>
+                  </a:tcPr>
+                </a:tc>
+              </a:tr>
+              <a:tr h="402336">
+                <a:tc>
+                  <a:txBody>
+                    <a:bodyPr/>
+                    <a:lstStyle/>
+                    <a:p>
+                      <a:pPr>
+                        <a:lnSpc>
+                          <a:spcPct val="110000"/>
+                        </a:lnSpc>
+                      </a:pPr>
+                      <a:r>
+                        <a:rPr sz="1050" b="0">
+                          <a:solidFill>
+                            <a:srgbClr val="1F2937"/>
+                          </a:solidFill>
+                          <a:latin typeface="Noto Looped Thai"/>
+                        </a:rPr>
+                        <a:t>ลบ habit ถาวร → ประวัติหาย คะแนนหายตาม</a:t>
+                      </a:r>
+                    </a:p>
+                  </a:txBody>
+                  <a:tcPr marL="91440" marR="91440" marT="36576" marB="36576" anchor="ctr">
+                    <a:solidFill>
+                      <a:srgbClr val="FFFFFF"/>
+                    </a:solidFill>
+                  </a:tcPr>
+                </a:tc>
+                <a:tc>
+                  <a:txBody>
+                    <a:bodyPr/>
+                    <a:lstStyle/>
+                    <a:p>
+                      <a:pPr>
+                        <a:lnSpc>
+                          <a:spcPct val="110000"/>
+                        </a:lnSpc>
+                      </a:pPr>
+                      <a:r>
+                        <a:rPr sz="1050" b="1">
+                          <a:solidFill>
+                            <a:srgbClr val="C53030"/>
+                          </a:solidFill>
+                          <a:latin typeface="Noto Looped Thai"/>
+                        </a:rPr>
+                        <a:t>หักคืน</a:t>
+                      </a:r>
+                    </a:p>
+                  </a:txBody>
+                  <a:tcPr marL="91440" marR="91440" marT="36576" marB="36576" anchor="ctr">
+                    <a:solidFill>
+                      <a:srgbClr val="FFFFFF"/>
+                    </a:solidFill>
+                  </a:tcPr>
+                </a:tc>
+              </a:tr>
+            </a:tbl>
+          </a:graphicData>
+        </a:graphic>
+      </p:graphicFrame>
+      <p:graphicFrame>
+        <p:nvGraphicFramePr>
+          <p:cNvPr id="10" name="Table 9"/>
+          <p:cNvGraphicFramePr>
+            <a:graphicFrameLocks noGrp="1"/>
+          </p:cNvGraphicFramePr>
+          <p:nvPr/>
+        </p:nvGraphicFramePr>
+        <p:xfrm>
+          <a:off x="640080" y="4663440"/>
+          <a:ext cx="5806440" cy="768096"/>
+        </p:xfrm>
+        <a:graphic>
+          <a:graphicData uri="http://schemas.openxmlformats.org/drawingml/2006/table">
+            <a:tbl>
+              <a:tblPr firstRow="1" bandRow="1">
+                <a:tableStyleId>{5C22544A-7EE6-4342-B048-85BDC9FD1C3A}</a:tableStyleId>
+              </a:tblPr>
+              <a:tblGrid>
+                <a:gridCol w="1161288"/>
+                <a:gridCol w="1161288"/>
+                <a:gridCol w="1161288"/>
+                <a:gridCol w="1161288"/>
+                <a:gridCol w="1161288"/>
+              </a:tblGrid>
+              <a:tr h="402336">
+                <a:tc>
+                  <a:txBody>
+                    <a:bodyPr/>
+                    <a:lstStyle/>
+                    <a:p>
+                      <a:pPr>
+                        <a:lnSpc>
+                          <a:spcPct val="110000"/>
+                        </a:lnSpc>
+                      </a:pPr>
+                      <a:r>
+                        <a:rPr sz="1150" b="1">
+                          <a:solidFill>
+                            <a:srgbClr val="FFFFFF"/>
+                          </a:solidFill>
+                          <a:latin typeface="Noto Looped Thai"/>
+                        </a:rPr>
+                        <a:t>บรอนซ์</a:t>
+                      </a:r>
+                    </a:p>
+                  </a:txBody>
+                  <a:tcPr marL="91440" marR="91440" marT="36576" marB="36576" anchor="ctr">
+                    <a:solidFill>
+                      <a:srgbClr val="0C2D48"/>
+                    </a:solidFill>
+                  </a:tcPr>
+                </a:tc>
+                <a:tc>
+                  <a:txBody>
+                    <a:bodyPr/>
+                    <a:lstStyle/>
+                    <a:p>
+                      <a:pPr>
+                        <a:lnSpc>
+                          <a:spcPct val="110000"/>
+                        </a:lnSpc>
+                      </a:pPr>
+                      <a:r>
+                        <a:rPr sz="1150" b="1">
+                          <a:solidFill>
+                            <a:srgbClr val="FFFFFF"/>
+                          </a:solidFill>
+                          <a:latin typeface="Noto Looped Thai"/>
+                        </a:rPr>
+                        <a:t>ซิลเวอร์</a:t>
+                      </a:r>
+                    </a:p>
+                  </a:txBody>
+                  <a:tcPr marL="91440" marR="91440" marT="36576" marB="36576" anchor="ctr">
+                    <a:solidFill>
+                      <a:srgbClr val="0C2D48"/>
+                    </a:solidFill>
+                  </a:tcPr>
+                </a:tc>
+                <a:tc>
+                  <a:txBody>
+                    <a:bodyPr/>
+                    <a:lstStyle/>
+                    <a:p>
+                      <a:pPr>
+                        <a:lnSpc>
+                          <a:spcPct val="110000"/>
+                        </a:lnSpc>
+                      </a:pPr>
+                      <a:r>
+                        <a:rPr sz="1150" b="1">
+                          <a:solidFill>
+                            <a:srgbClr val="FFFFFF"/>
+                          </a:solidFill>
+                          <a:latin typeface="Noto Looped Thai"/>
+                        </a:rPr>
+                        <a:t>โกลด์</a:t>
+                      </a:r>
+                    </a:p>
+                  </a:txBody>
+                  <a:tcPr marL="91440" marR="91440" marT="36576" marB="36576" anchor="ctr">
+                    <a:solidFill>
+                      <a:srgbClr val="0C2D48"/>
+                    </a:solidFill>
+                  </a:tcPr>
+                </a:tc>
+                <a:tc>
+                  <a:txBody>
+                    <a:bodyPr/>
+                    <a:lstStyle/>
+                    <a:p>
+                      <a:pPr>
+                        <a:lnSpc>
+                          <a:spcPct val="110000"/>
+                        </a:lnSpc>
+                      </a:pPr>
+                      <a:r>
+                        <a:rPr sz="1150" b="1">
+                          <a:solidFill>
+                            <a:srgbClr val="FFFFFF"/>
+                          </a:solidFill>
+                          <a:latin typeface="Noto Looped Thai"/>
+                        </a:rPr>
+                        <a:t>แพลตินัม</a:t>
+                      </a:r>
+                    </a:p>
+                  </a:txBody>
+                  <a:tcPr marL="91440" marR="91440" marT="36576" marB="36576" anchor="ctr">
+                    <a:solidFill>
+                      <a:srgbClr val="0C2D48"/>
+                    </a:solidFill>
+                  </a:tcPr>
+                </a:tc>
+                <a:tc>
+                  <a:txBody>
+                    <a:bodyPr/>
+                    <a:lstStyle/>
+                    <a:p>
+                      <a:pPr>
+                        <a:lnSpc>
+                          <a:spcPct val="110000"/>
+                        </a:lnSpc>
+                      </a:pPr>
+                      <a:r>
+                        <a:rPr sz="1150" b="1">
+                          <a:solidFill>
+                            <a:srgbClr val="FFFFFF"/>
+                          </a:solidFill>
+                          <a:latin typeface="Noto Looped Thai"/>
+                        </a:rPr>
+                        <a:t>ไดมอนด์</a:t>
+                      </a:r>
+                    </a:p>
+                  </a:txBody>
+                  <a:tcPr marL="91440" marR="91440" marT="36576" marB="36576" anchor="ctr">
+                    <a:solidFill>
+                      <a:srgbClr val="0C2D48"/>
+                    </a:solidFill>
+                  </a:tcPr>
+                </a:tc>
+              </a:tr>
+              <a:tr h="365760">
+                <a:tc>
+                  <a:txBody>
+                    <a:bodyPr/>
+                    <a:lstStyle/>
+                    <a:p>
+                      <a:pPr>
+                        <a:lnSpc>
+                          <a:spcPct val="110000"/>
+                        </a:lnSpc>
+                      </a:pPr>
+                      <a:r>
+                        <a:rPr sz="1050" b="0">
+                          <a:solidFill>
+                            <a:srgbClr val="1F2937"/>
+                          </a:solidFill>
+                          <a:latin typeface="Noto Looped Thai"/>
+                        </a:rPr>
+                        <a:t>0</a:t>
+                      </a:r>
+                    </a:p>
+                  </a:txBody>
+                  <a:tcPr marL="91440" marR="91440" marT="36576" marB="36576" anchor="ctr">
+                    <a:solidFill>
+                      <a:srgbClr val="FFFFFF"/>
+                    </a:solidFill>
+                  </a:tcPr>
+                </a:tc>
+                <a:tc>
+                  <a:txBody>
+                    <a:bodyPr/>
+                    <a:lstStyle/>
+                    <a:p>
+                      <a:pPr>
+                        <a:lnSpc>
+                          <a:spcPct val="110000"/>
+                        </a:lnSpc>
+                      </a:pPr>
+                      <a:r>
+                        <a:rPr sz="1050" b="0">
+                          <a:solidFill>
+                            <a:srgbClr val="1F2937"/>
+                          </a:solidFill>
+                          <a:latin typeface="Noto Looped Thai"/>
+                        </a:rPr>
+                        <a:t>500</a:t>
+                      </a:r>
+                    </a:p>
+                  </a:txBody>
+                  <a:tcPr marL="91440" marR="91440" marT="36576" marB="36576" anchor="ctr">
+                    <a:solidFill>
+                      <a:srgbClr val="FFFFFF"/>
+                    </a:solidFill>
+                  </a:tcPr>
+                </a:tc>
+                <a:tc>
+                  <a:txBody>
+                    <a:bodyPr/>
+                    <a:lstStyle/>
+                    <a:p>
+                      <a:pPr>
+                        <a:lnSpc>
+                          <a:spcPct val="110000"/>
+                        </a:lnSpc>
+                      </a:pPr>
+                      <a:r>
+                        <a:rPr sz="1050" b="0">
+                          <a:solidFill>
+                            <a:srgbClr val="1F2937"/>
+                          </a:solidFill>
+                          <a:latin typeface="Noto Looped Thai"/>
+                        </a:rPr>
+                        <a:t>1,500</a:t>
+                      </a:r>
+                    </a:p>
+                  </a:txBody>
+                  <a:tcPr marL="91440" marR="91440" marT="36576" marB="36576" anchor="ctr">
+                    <a:solidFill>
+                      <a:srgbClr val="FFFFFF"/>
+                    </a:solidFill>
+                  </a:tcPr>
+                </a:tc>
+                <a:tc>
+                  <a:txBody>
+                    <a:bodyPr/>
+                    <a:lstStyle/>
+                    <a:p>
+                      <a:pPr>
+                        <a:lnSpc>
+                          <a:spcPct val="110000"/>
+                        </a:lnSpc>
+                      </a:pPr>
+                      <a:r>
+                        <a:rPr sz="1050" b="0">
+                          <a:solidFill>
+                            <a:srgbClr val="1F2937"/>
+                          </a:solidFill>
+                          <a:latin typeface="Noto Looped Thai"/>
+                        </a:rPr>
+                        <a:t>4,000</a:t>
+                      </a:r>
+                    </a:p>
+                  </a:txBody>
+                  <a:tcPr marL="91440" marR="91440" marT="36576" marB="36576" anchor="ctr">
+                    <a:solidFill>
+                      <a:srgbClr val="FFFFFF"/>
+                    </a:solidFill>
+                  </a:tcPr>
+                </a:tc>
+                <a:tc>
+                  <a:txBody>
+                    <a:bodyPr/>
+                    <a:lstStyle/>
+                    <a:p>
+                      <a:pPr>
+                        <a:lnSpc>
+                          <a:spcPct val="110000"/>
+                        </a:lnSpc>
+                      </a:pPr>
+                      <a:r>
+                        <a:rPr sz="1050" b="0">
+                          <a:solidFill>
+                            <a:srgbClr val="1F2937"/>
+                          </a:solidFill>
+                          <a:latin typeface="Noto Looped Thai"/>
+                        </a:rPr>
+                        <a:t>10,000</a:t>
+                      </a:r>
+                    </a:p>
+                  </a:txBody>
+                  <a:tcPr marL="91440" marR="91440" marT="36576" marB="36576" anchor="ctr">
+                    <a:solidFill>
+                      <a:srgbClr val="FFFFFF"/>
+                    </a:solidFill>
+                  </a:tcPr>
+                </a:tc>
+              </a:tr>
+            </a:tbl>
+          </a:graphicData>
+        </a:graphic>
+      </p:graphicFrame>
+      <p:sp>
+        <p:nvSpPr>
+          <p:cNvPr id="11" name="Rounded Rectangle 10"/>
           <p:cNvSpPr/>
           <p:nvPr/>
         </p:nvSpPr>
         <p:spPr>
           <a:xfrm>
-            <a:off x="640080" y="1280160"/>
-            <a:ext cx="5349240" cy="2697480"/>
+            <a:off x="6784848" y="1271016"/>
+            <a:ext cx="1976143" cy="3986783"/>
           </a:xfrm>
           <a:prstGeom prst="roundRect">
             <a:avLst>
@@ -8568,248 +9346,30 @@
           <a:p/>
         </p:txBody>
       </p:sp>
-      <p:sp>
-        <p:nvSpPr>
-          <p:cNvPr id="10" name="Rectangle 9"/>
-          <p:cNvSpPr/>
-          <p:nvPr/>
-        </p:nvSpPr>
-        <p:spPr>
-          <a:xfrm>
-            <a:off x="640080" y="1280160"/>
-            <a:ext cx="54864" cy="2697480"/>
-          </a:xfrm>
-          <a:prstGeom prst="rect">
-            <a:avLst/>
-          </a:prstGeom>
-          <a:solidFill>
-            <a:srgbClr val="2E8B8B"/>
-          </a:solidFill>
-          <a:ln w="9525">
-            <a:solidFill>
-              <a:srgbClr val="2E8B8B"/>
-            </a:solidFill>
-          </a:ln>
-          <a:effectLst/>
-        </p:spPr>
-        <p:style>
-          <a:lnRef idx="1">
-            <a:schemeClr val="accent1"/>
-          </a:lnRef>
-          <a:fillRef idx="3">
-            <a:schemeClr val="accent1"/>
-          </a:fillRef>
-          <a:effectRef idx="2">
-            <a:schemeClr val="accent1"/>
-          </a:effectRef>
-          <a:fontRef idx="minor">
-            <a:schemeClr val="lt1"/>
-          </a:fontRef>
-        </p:style>
-        <p:txBody>
-          <a:bodyPr rtlCol="0" anchor="ctr"/>
-          <a:lstStyle/>
-          <a:p/>
-        </p:txBody>
-      </p:sp>
-      <p:sp>
-        <p:nvSpPr>
-          <p:cNvPr id="11" name="TextBox 10"/>
-          <p:cNvSpPr txBox="1"/>
-          <p:nvPr/>
-        </p:nvSpPr>
-        <p:spPr>
-          <a:xfrm>
-            <a:off x="868680" y="1499616"/>
-            <a:ext cx="4937759" cy="310896"/>
-          </a:xfrm>
-          <a:prstGeom prst="rect">
-            <a:avLst/>
-          </a:prstGeom>
-          <a:noFill/>
-        </p:spPr>
-        <p:txBody>
-          <a:bodyPr wrap="square" anchor="t" lIns="0" rIns="0" tIns="0" bIns="0">
-            <a:spAutoFit/>
-          </a:bodyPr>
-          <a:lstStyle/>
-          <a:p>
-            <a:pPr algn="l">
-              <a:lnSpc>
-                <a:spcPct val="115000"/>
-              </a:lnSpc>
-              <a:spcAft>
-                <a:spcPts val="400"/>
-              </a:spcAft>
-            </a:pPr>
-            <a:r>
-              <a:rPr sz="1450" b="1">
-                <a:solidFill>
-                  <a:srgbClr val="0C2D48"/>
-                </a:solidFill>
-                <a:latin typeface="Noto Looped Thai"/>
-              </a:rPr>
-              <a:t>กำลังพัฒนา: หมวดหมู่ 4 ด้าน + คะแนนต่อเนื่อง</a:t>
-            </a:r>
-          </a:p>
-        </p:txBody>
-      </p:sp>
-      <p:sp>
-        <p:nvSpPr>
-          <p:cNvPr id="12" name="TextBox 11"/>
-          <p:cNvSpPr txBox="1"/>
-          <p:nvPr/>
-        </p:nvSpPr>
-        <p:spPr>
-          <a:xfrm>
-            <a:off x="868680" y="1993391"/>
-            <a:ext cx="4892040" cy="1828800"/>
-          </a:xfrm>
-          <a:prstGeom prst="rect">
-            <a:avLst/>
-          </a:prstGeom>
-          <a:noFill/>
-        </p:spPr>
-        <p:txBody>
-          <a:bodyPr wrap="square" anchor="t" lIns="0" rIns="0" tIns="0" bIns="0">
-            <a:spAutoFit/>
-          </a:bodyPr>
-          <a:lstStyle/>
-          <a:p>
-            <a:pPr algn="l">
-              <a:lnSpc>
-                <a:spcPct val="125000"/>
-              </a:lnSpc>
-              <a:spcAft>
-                <a:spcPts val="300"/>
-              </a:spcAft>
-            </a:pPr>
-            <a:r>
-              <a:rPr sz="1080" b="0">
-                <a:solidFill>
-                  <a:srgbClr val="1F2937"/>
-                </a:solidFill>
-                <a:latin typeface="Noto Looped Thai"/>
-              </a:rPr>
-              <a:t>แบ่งเป็น 5 ก้อน ทำวันละก้อน</a:t>
-            </a:r>
-          </a:p>
-          <a:p>
-            <a:pPr algn="l">
-              <a:lnSpc>
-                <a:spcPct val="125000"/>
-              </a:lnSpc>
-              <a:spcAft>
-                <a:spcPts val="300"/>
-              </a:spcAft>
-            </a:pPr>
-            <a:r>
-              <a:rPr sz="1080" b="0">
-                <a:solidFill>
-                  <a:srgbClr val="1F2937"/>
-                </a:solidFill>
-                <a:latin typeface="Noto Looped Thai"/>
-              </a:rPr>
-              <a:t>1. ลบ / พัก habit จากหน้าหลัก — เสร็จ 22 ก.ย. 2569</a:t>
-            </a:r>
-          </a:p>
-          <a:p>
-            <a:pPr algn="l">
-              <a:lnSpc>
-                <a:spcPct val="125000"/>
-              </a:lnSpc>
-              <a:spcAft>
-                <a:spcPts val="300"/>
-              </a:spcAft>
-            </a:pPr>
-            <a:r>
-              <a:rPr sz="1080" b="0">
-                <a:solidFill>
-                  <a:srgbClr val="1F2937"/>
-                </a:solidFill>
-                <a:latin typeface="Noto Looped Thai"/>
-              </a:rPr>
-              <a:t>2. ยุบเป็น 4 หมวด: ร่างกาย · การกิน · การนอน · จิตใจ</a:t>
-            </a:r>
-          </a:p>
-          <a:p>
-            <a:pPr algn="l">
-              <a:lnSpc>
-                <a:spcPct val="125000"/>
-              </a:lnSpc>
-              <a:spcAft>
-                <a:spcPts val="300"/>
-              </a:spcAft>
-            </a:pPr>
-            <a:r>
-              <a:rPr sz="1080" b="0">
-                <a:solidFill>
-                  <a:srgbClr val="1F2937"/>
-                </a:solidFill>
-                <a:latin typeface="Noto Looped Thai"/>
-              </a:rPr>
-              <a:t>3. habit แบบเลือก 3 ระดับ (วันนี้รู้สึกดีไหม มาก/กลาง/น้อย)</a:t>
-            </a:r>
-          </a:p>
-          <a:p>
-            <a:pPr algn="l">
-              <a:lnSpc>
-                <a:spcPct val="125000"/>
-              </a:lnSpc>
-              <a:spcAft>
-                <a:spcPts val="300"/>
-              </a:spcAft>
-            </a:pPr>
-            <a:r>
-              <a:rPr sz="1080" b="0">
-                <a:solidFill>
-                  <a:srgbClr val="1F2937"/>
-                </a:solidFill>
-                <a:latin typeface="Noto Looped Thai"/>
-              </a:rPr>
-              <a:t>4. คะแนนตามความต่อเนื่อง ทำครบ 4 หมวดได้ 40 คะแนน/วัน</a:t>
-            </a:r>
-          </a:p>
-          <a:p>
-            <a:pPr algn="l">
-              <a:lnSpc>
-                <a:spcPct val="125000"/>
-              </a:lnSpc>
-              <a:spcAft>
-                <a:spcPts val="300"/>
-              </a:spcAft>
-            </a:pPr>
-            <a:r>
-              <a:rPr sz="1080" b="0">
-                <a:solidFill>
-                  <a:srgbClr val="1F2937"/>
-                </a:solidFill>
-                <a:latin typeface="Noto Looped Thai"/>
-              </a:rPr>
-              <a:t>    ไม่ทำถูกหักคะแนน เหมือนคะแนนแรงค์ในเกม</a:t>
-            </a:r>
-          </a:p>
-          <a:p>
-            <a:pPr algn="l">
-              <a:lnSpc>
-                <a:spcPct val="125000"/>
-              </a:lnSpc>
-              <a:spcAft>
-                <a:spcPts val="300"/>
-              </a:spcAft>
-            </a:pPr>
-            <a:r>
-              <a:rPr sz="1080" b="0">
-                <a:solidFill>
-                  <a:srgbClr val="1F2937"/>
-                </a:solidFill>
-                <a:latin typeface="Noto Looped Thai"/>
-              </a:rPr>
-              <a:t>5. หลอดคะแนนรวมและแยกแต่ละด้าน + อันดับแยกด้าน</a:t>
-            </a:r>
-          </a:p>
-        </p:txBody>
-      </p:sp>
+      <p:pic>
+        <p:nvPicPr>
+          <p:cNvPr id="12" name="Picture 11" descr="02_analytics.png"/>
+          <p:cNvPicPr>
+            <a:picLocks noChangeAspect="1"/>
+          </p:cNvPicPr>
+          <p:nvPr/>
+        </p:nvPicPr>
+        <p:blipFill>
+          <a:blip r:embed="rId2"/>
+          <a:stretch>
+            <a:fillRect/>
+          </a:stretch>
+        </p:blipFill>
+        <p:spPr>
+          <a:xfrm>
+            <a:off x="6812280" y="1298448"/>
+            <a:ext cx="1921279" cy="3931920"/>
+          </a:xfrm>
+          <a:prstGeom prst="rect">
+            <a:avLst/>
+          </a:prstGeom>
+        </p:spPr>
+      </p:pic>
       <p:sp>
         <p:nvSpPr>
           <p:cNvPr id="13" name="Rounded Rectangle 12"/>
@@ -8818,8 +9378,8 @@
         </p:nvSpPr>
         <p:spPr>
           <a:xfrm>
-            <a:off x="6217920" y="1280160"/>
-            <a:ext cx="5349240" cy="2697480"/>
+            <a:off x="8887968" y="1271016"/>
+            <a:ext cx="1976143" cy="3986783"/>
           </a:xfrm>
           <a:prstGeom prst="roundRect">
             <a:avLst>
@@ -8856,50 +9416,30 @@
           <a:p/>
         </p:txBody>
       </p:sp>
-      <p:sp>
-        <p:nvSpPr>
-          <p:cNvPr id="14" name="Rectangle 13"/>
-          <p:cNvSpPr/>
-          <p:nvPr/>
-        </p:nvSpPr>
-        <p:spPr>
-          <a:xfrm>
-            <a:off x="6217920" y="1280160"/>
-            <a:ext cx="54864" cy="2697480"/>
-          </a:xfrm>
-          <a:prstGeom prst="rect">
-            <a:avLst/>
-          </a:prstGeom>
-          <a:solidFill>
-            <a:srgbClr val="D69E2E"/>
-          </a:solidFill>
-          <a:ln w="9525">
-            <a:solidFill>
-              <a:srgbClr val="D69E2E"/>
-            </a:solidFill>
-          </a:ln>
-          <a:effectLst/>
-        </p:spPr>
-        <p:style>
-          <a:lnRef idx="1">
-            <a:schemeClr val="accent1"/>
-          </a:lnRef>
-          <a:fillRef idx="3">
-            <a:schemeClr val="accent1"/>
-          </a:fillRef>
-          <a:effectRef idx="2">
-            <a:schemeClr val="accent1"/>
-          </a:effectRef>
-          <a:fontRef idx="minor">
-            <a:schemeClr val="lt1"/>
-          </a:fontRef>
-        </p:style>
-        <p:txBody>
-          <a:bodyPr rtlCol="0" anchor="ctr"/>
-          <a:lstStyle/>
-          <a:p/>
-        </p:txBody>
-      </p:sp>
+      <p:pic>
+        <p:nvPicPr>
+          <p:cNvPr id="14" name="Picture 13" descr="11_popup.png"/>
+          <p:cNvPicPr>
+            <a:picLocks noChangeAspect="1"/>
+          </p:cNvPicPr>
+          <p:nvPr/>
+        </p:nvPicPr>
+        <p:blipFill>
+          <a:blip r:embed="rId3"/>
+          <a:stretch>
+            <a:fillRect/>
+          </a:stretch>
+        </p:blipFill>
+        <p:spPr>
+          <a:xfrm>
+            <a:off x="8915400" y="1298448"/>
+            <a:ext cx="1921279" cy="3931920"/>
+          </a:xfrm>
+          <a:prstGeom prst="rect">
+            <a:avLst/>
+          </a:prstGeom>
+        </p:spPr>
+      </p:pic>
       <p:sp>
         <p:nvSpPr>
           <p:cNvPr id="15" name="TextBox 14"/>
@@ -8908,21 +9448,21 @@
         </p:nvSpPr>
         <p:spPr>
           <a:xfrm>
-            <a:off x="6446520" y="1499616"/>
-            <a:ext cx="4937759" cy="310896"/>
-          </a:xfrm>
-          <a:prstGeom prst="rect">
-            <a:avLst/>
-          </a:prstGeom>
-          <a:noFill/>
-        </p:spPr>
-        <p:txBody>
-          <a:bodyPr wrap="square" anchor="t" lIns="0" rIns="0" tIns="0" bIns="0">
-            <a:spAutoFit/>
-          </a:bodyPr>
-          <a:lstStyle/>
-          <a:p>
-            <a:pPr algn="l">
+            <a:off x="6675120" y="5349240"/>
+            <a:ext cx="4937760" cy="457200"/>
+          </a:xfrm>
+          <a:prstGeom prst="rect">
+            <a:avLst/>
+          </a:prstGeom>
+          <a:noFill/>
+        </p:spPr>
+        <p:txBody>
+          <a:bodyPr wrap="square" anchor="t" lIns="0" rIns="0" tIns="0" bIns="0">
+            <a:spAutoFit/>
+          </a:bodyPr>
+          <a:lstStyle/>
+          <a:p>
+            <a:pPr algn="ctr">
               <a:lnSpc>
                 <a:spcPct val="115000"/>
               </a:lnSpc>
@@ -8931,318 +9471,13 @@
               </a:spcAft>
             </a:pPr>
             <a:r>
-              <a:rPr sz="1450" b="1">
-                <a:solidFill>
-                  <a:srgbClr val="0C2D48"/>
-                </a:solidFill>
-                <a:latin typeface="Noto Looped Thai"/>
-              </a:rPr>
-              <a:t>ข้อจำกัดที่ยังเหลือ (ยังไม่ได้ทำ)</a:t>
-            </a:r>
-          </a:p>
-        </p:txBody>
-      </p:sp>
-      <p:sp>
-        <p:nvSpPr>
-          <p:cNvPr id="16" name="TextBox 15"/>
-          <p:cNvSpPr txBox="1"/>
-          <p:nvPr/>
-        </p:nvSpPr>
-        <p:spPr>
-          <a:xfrm>
-            <a:off x="6446520" y="1993391"/>
-            <a:ext cx="4892040" cy="1828800"/>
-          </a:xfrm>
-          <a:prstGeom prst="rect">
-            <a:avLst/>
-          </a:prstGeom>
-          <a:noFill/>
-        </p:spPr>
-        <p:txBody>
-          <a:bodyPr wrap="square" anchor="t" lIns="0" rIns="0" tIns="0" bIns="0">
-            <a:spAutoFit/>
-          </a:bodyPr>
-          <a:lstStyle/>
-          <a:p>
-            <a:pPr algn="l">
-              <a:lnSpc>
-                <a:spcPct val="125000"/>
-              </a:lnSpc>
-              <a:spcAft>
-                <a:spcPts val="300"/>
-              </a:spcAft>
-            </a:pPr>
-            <a:r>
-              <a:rPr sz="1080" b="0">
-                <a:solidFill>
-                  <a:srgbClr val="1F2937"/>
-                </a:solidFill>
-                <a:latin typeface="Noto Looped Thai"/>
-              </a:rPr>
-              <a:t>• ยังไม่ได้ทดสอบเสียงแจ้งเตือนเด้งบนมือถือจริง</a:t>
-            </a:r>
-          </a:p>
-          <a:p>
-            <a:pPr algn="l">
-              <a:lnSpc>
-                <a:spcPct val="125000"/>
-              </a:lnSpc>
-              <a:spcAft>
-                <a:spcPts val="300"/>
-              </a:spcAft>
-            </a:pPr>
-            <a:r>
-              <a:rPr sz="1080" b="0">
-                <a:solidFill>
-                  <a:srgbClr val="1F2937"/>
-                </a:solidFill>
-                <a:latin typeface="Noto Looped Thai"/>
-              </a:rPr>
-              <a:t>• ยังไม่ได้ทดลองกับผู้ใช้จริงและเก็บแบบประเมินความพึงพอใจ</a:t>
-            </a:r>
-          </a:p>
-          <a:p>
-            <a:pPr algn="l">
-              <a:lnSpc>
-                <a:spcPct val="125000"/>
-              </a:lnSpc>
-              <a:spcAft>
-                <a:spcPts val="300"/>
-              </a:spcAft>
-            </a:pPr>
-            <a:r>
-              <a:rPr sz="1080" b="0">
-                <a:solidFill>
-                  <a:srgbClr val="1F2937"/>
-                </a:solidFill>
-                <a:latin typeface="Noto Looped Thai"/>
-              </a:rPr>
-              <a:t>• รหัสแอปยังเป็นค่าเริ่มต้น com.example ต้องเปลี่ยนก่อนเผยแพร่</a:t>
-            </a:r>
-          </a:p>
-          <a:p>
-            <a:pPr algn="l">
-              <a:lnSpc>
-                <a:spcPct val="125000"/>
-              </a:lnSpc>
-              <a:spcAft>
-                <a:spcPts val="300"/>
-              </a:spcAft>
-            </a:pPr>
-            <a:r>
-              <a:rPr sz="1080" b="0">
-                <a:solidFill>
-                  <a:srgbClr val="1F2937"/>
-                </a:solidFill>
-                <a:latin typeface="Noto Looped Thai"/>
-              </a:rPr>
-              <a:t>• ยังไม่ได้เผยแพร่ขึ้น Play Store</a:t>
-            </a:r>
-          </a:p>
-          <a:p>
-            <a:pPr algn="l">
-              <a:lnSpc>
-                <a:spcPct val="125000"/>
-              </a:lnSpc>
-              <a:spcAft>
-                <a:spcPts val="300"/>
-              </a:spcAft>
-            </a:pPr>
-            <a:r>
-              <a:rPr sz="1080" b="0">
-                <a:solidFill>
-                  <a:srgbClr val="1F2937"/>
-                </a:solidFill>
-                <a:latin typeface="Noto Looped Thai"/>
-              </a:rPr>
-              <a:t>• เซิร์ฟเวอร์ใช้แผนฟรี ถ้าไม่มีใครใช้ 7 วันจะถูกพักอัตโนมัติ</a:t>
-            </a:r>
-          </a:p>
-          <a:p>
-            <a:pPr algn="l">
-              <a:lnSpc>
-                <a:spcPct val="125000"/>
-              </a:lnSpc>
-              <a:spcAft>
-                <a:spcPts val="300"/>
-              </a:spcAft>
-            </a:pPr>
-            <a:r>
-              <a:rPr sz="1080" b="0">
-                <a:solidFill>
-                  <a:srgbClr val="1F2937"/>
-                </a:solidFill>
-                <a:latin typeface="Noto Looped Thai"/>
-              </a:rPr>
-              <a:t>    ต้องเข้าไปปลุกก่อนวันสอบ</a:t>
-            </a:r>
-          </a:p>
-        </p:txBody>
-      </p:sp>
-      <p:sp>
-        <p:nvSpPr>
-          <p:cNvPr id="17" name="Rounded Rectangle 16"/>
-          <p:cNvSpPr/>
-          <p:nvPr/>
-        </p:nvSpPr>
-        <p:spPr>
-          <a:xfrm>
-            <a:off x="640080" y="4206240"/>
-            <a:ext cx="10927080" cy="1554480"/>
-          </a:xfrm>
-          <a:prstGeom prst="roundRect">
-            <a:avLst>
-              <a:gd name="adj" fmla="val 12000"/>
-            </a:avLst>
-          </a:prstGeom>
-          <a:solidFill>
-            <a:srgbClr val="FFF8E6"/>
-          </a:solidFill>
-          <a:ln w="9525">
-            <a:solidFill>
-              <a:srgbClr val="F3D38A"/>
-            </a:solidFill>
-          </a:ln>
-          <a:effectLst/>
-        </p:spPr>
-        <p:style>
-          <a:lnRef idx="1">
-            <a:schemeClr val="accent1"/>
-          </a:lnRef>
-          <a:fillRef idx="3">
-            <a:schemeClr val="accent1"/>
-          </a:fillRef>
-          <a:effectRef idx="2">
-            <a:schemeClr val="accent1"/>
-          </a:effectRef>
-          <a:fontRef idx="minor">
-            <a:schemeClr val="lt1"/>
-          </a:fontRef>
-        </p:style>
-        <p:txBody>
-          <a:bodyPr rtlCol="0" anchor="ctr"/>
-          <a:lstStyle/>
-          <a:p/>
-        </p:txBody>
-      </p:sp>
-      <p:sp>
-        <p:nvSpPr>
-          <p:cNvPr id="18" name="TextBox 17"/>
-          <p:cNvSpPr txBox="1"/>
-          <p:nvPr/>
-        </p:nvSpPr>
-        <p:spPr>
-          <a:xfrm>
-            <a:off x="896112" y="4471416"/>
-            <a:ext cx="1554480" cy="256032"/>
-          </a:xfrm>
-          <a:prstGeom prst="rect">
-            <a:avLst/>
-          </a:prstGeom>
-          <a:noFill/>
-        </p:spPr>
-        <p:txBody>
-          <a:bodyPr wrap="square" anchor="t" lIns="0" rIns="0" tIns="0" bIns="0">
-            <a:spAutoFit/>
-          </a:bodyPr>
-          <a:lstStyle/>
-          <a:p>
-            <a:pPr algn="l">
-              <a:lnSpc>
-                <a:spcPct val="115000"/>
-              </a:lnSpc>
-              <a:spcAft>
-                <a:spcPts val="400"/>
-              </a:spcAft>
-            </a:pPr>
-            <a:r>
-              <a:rPr sz="1500" b="1">
-                <a:solidFill>
-                  <a:srgbClr val="8A5B00"/>
-                </a:solidFill>
-                <a:latin typeface="Noto Looped Thai"/>
-              </a:rPr>
-              <a:t>สิ่งที่ต้องเตรียมก่อนวันสอบ</a:t>
-            </a:r>
-          </a:p>
-        </p:txBody>
-      </p:sp>
-      <p:sp>
-        <p:nvSpPr>
-          <p:cNvPr id="19" name="TextBox 18"/>
-          <p:cNvSpPr txBox="1"/>
-          <p:nvPr/>
-        </p:nvSpPr>
-        <p:spPr>
-          <a:xfrm>
-            <a:off x="2331720" y="4361688"/>
-            <a:ext cx="8915400" cy="1234440"/>
-          </a:xfrm>
-          <a:prstGeom prst="rect">
-            <a:avLst/>
-          </a:prstGeom>
-          <a:noFill/>
-        </p:spPr>
-        <p:txBody>
-          <a:bodyPr wrap="square" anchor="t" lIns="0" rIns="0" tIns="0" bIns="0">
-            <a:spAutoFit/>
-          </a:bodyPr>
-          <a:lstStyle/>
-          <a:p>
-            <a:pPr algn="l">
-              <a:lnSpc>
-                <a:spcPct val="135000"/>
-              </a:lnSpc>
-              <a:spcAft>
-                <a:spcPts val="400"/>
-              </a:spcAft>
-            </a:pPr>
-            <a:r>
-              <a:rPr sz="1200" b="0">
-                <a:solidFill>
-                  <a:srgbClr val="1F2937"/>
-                </a:solidFill>
-                <a:latin typeface="Noto Looped Thai"/>
-              </a:rPr>
-              <a:t>1) เข้าหน้าจัดการเซิร์ฟเวอร์เพื่อปลุกโปรเจคให้ตื่น แล้วลองสมัคร–ติ๊ก–ดูอันดับให้ครบหนึ่งรอบ</a:t>
-            </a:r>
-          </a:p>
-          <a:p>
-            <a:pPr algn="l">
-              <a:lnSpc>
-                <a:spcPct val="135000"/>
-              </a:lnSpc>
-              <a:spcAft>
-                <a:spcPts val="400"/>
-              </a:spcAft>
-            </a:pPr>
-            <a:r>
-              <a:rPr sz="1200" b="0">
-                <a:solidFill>
-                  <a:srgbClr val="1F2937"/>
-                </a:solidFill>
-                <a:latin typeface="Noto Looped Thai"/>
-              </a:rPr>
-              <a:t>2) ติดตั้งไฟล์ APK ล่าสุดลงมือถือที่จะใช้สาธิต และเปิดใช้ครั้งหนึ่งก่อน</a:t>
-            </a:r>
-          </a:p>
-          <a:p>
-            <a:pPr algn="l">
-              <a:lnSpc>
-                <a:spcPct val="135000"/>
-              </a:lnSpc>
-              <a:spcAft>
-                <a:spcPts val="400"/>
-              </a:spcAft>
-            </a:pPr>
-            <a:r>
-              <a:rPr sz="1200" b="0">
-                <a:solidFill>
-                  <a:srgbClr val="1F2937"/>
-                </a:solidFill>
-                <a:latin typeface="Noto Looped Thai"/>
-              </a:rPr>
-              <a:t>3) เตรียมวิดีโอสาธิตสำรอง เผื่ออินเทอร์เน็ตหน้างานใช้ไม่ได้</a:t>
+              <a:rPr sz="1050" b="1">
+                <a:solidFill>
+                  <a:srgbClr val="64748B"/>
+                </a:solidFill>
+                <a:latin typeface="Noto Looped Thai"/>
+              </a:rPr>
+              <a:t>ซ้าย: หลอดคะแนนรวม + แยก 4 ด้าน · ขวา: popup ตอนได้คะแนน</a:t>
             </a:r>
           </a:p>
         </p:txBody>
@@ -9390,7 +9625,7 @@
                 </a:solidFill>
                 <a:latin typeface="Noto Looped Thai"/>
               </a:rPr>
-              <a:t>ผลส่งมอบของโครงงาน</a:t>
+              <a:t>ข้อจำกัดที่ยังเหลือ และสิ่งที่ต้องทำก่อนวันสอบ</a:t>
             </a:r>
           </a:p>
         </p:txBody>
@@ -9432,7 +9667,7 @@
                 </a:solidFill>
                 <a:latin typeface="Noto Looped Thai"/>
               </a:rPr>
-              <a:t>สิ่งที่กรรมการตรวจรับได้หลังการสอบ</a:t>
+              <a:t>แยกให้ชัดว่าอะไรเสร็จแล้ว และอะไรยังไม่ได้ทำ ไม่เคลมเกินของจริง</a:t>
             </a:r>
           </a:p>
         </p:txBody>
@@ -9562,7 +9797,7 @@
                 </a:solidFill>
                 <a:latin typeface="Noto Looped Thai"/>
               </a:rPr>
-              <a:t>ของจริง + เอกสาร + Source</a:t>
+              <a:t>ยังไม่เสร็จ พูดตรง</a:t>
             </a:r>
           </a:p>
         </p:txBody>
@@ -9575,1040 +9810,8 @@
         </p:nvSpPr>
         <p:spPr>
           <a:xfrm>
-            <a:off x="777240" y="1298448"/>
-            <a:ext cx="475488" cy="475488"/>
-          </a:xfrm>
-          <a:prstGeom prst="roundRect">
-            <a:avLst>
-              <a:gd name="adj" fmla="val 20000"/>
-            </a:avLst>
-          </a:prstGeom>
-          <a:solidFill>
-            <a:srgbClr val="2F855A"/>
-          </a:solidFill>
-          <a:ln w="9525">
-            <a:solidFill>
-              <a:srgbClr val="2F855A"/>
-            </a:solidFill>
-          </a:ln>
-          <a:effectLst/>
-        </p:spPr>
-        <p:style>
-          <a:lnRef idx="1">
-            <a:schemeClr val="accent1"/>
-          </a:lnRef>
-          <a:fillRef idx="3">
-            <a:schemeClr val="accent1"/>
-          </a:fillRef>
-          <a:effectRef idx="2">
-            <a:schemeClr val="accent1"/>
-          </a:effectRef>
-          <a:fontRef idx="minor">
-            <a:schemeClr val="lt1"/>
-          </a:fontRef>
-        </p:style>
-        <p:txBody>
-          <a:bodyPr rtlCol="0" anchor="ctr"/>
-          <a:lstStyle/>
-          <a:p/>
-        </p:txBody>
-      </p:sp>
-      <p:sp>
-        <p:nvSpPr>
-          <p:cNvPr id="10" name="TextBox 9"/>
-          <p:cNvSpPr txBox="1"/>
-          <p:nvPr/>
-        </p:nvSpPr>
-        <p:spPr>
-          <a:xfrm>
-            <a:off x="777240" y="1399032"/>
-            <a:ext cx="475488" cy="274320"/>
-          </a:xfrm>
-          <a:prstGeom prst="rect">
-            <a:avLst/>
-          </a:prstGeom>
-          <a:noFill/>
-        </p:spPr>
-        <p:txBody>
-          <a:bodyPr wrap="square" anchor="t" lIns="0" rIns="0" tIns="0" bIns="0">
-            <a:spAutoFit/>
-          </a:bodyPr>
-          <a:lstStyle/>
-          <a:p>
-            <a:pPr algn="ctr">
-              <a:lnSpc>
-                <a:spcPct val="115000"/>
-              </a:lnSpc>
-              <a:spcAft>
-                <a:spcPts val="400"/>
-              </a:spcAft>
-            </a:pPr>
-            <a:r>
-              <a:rPr sz="1800" b="1">
-                <a:solidFill>
-                  <a:srgbClr val="FFFFFF"/>
-                </a:solidFill>
-                <a:latin typeface="Arial"/>
-              </a:rPr>
-              <a:t>✓</a:t>
-            </a:r>
-          </a:p>
-        </p:txBody>
-      </p:sp>
-      <p:sp>
-        <p:nvSpPr>
-          <p:cNvPr id="11" name="TextBox 10"/>
-          <p:cNvSpPr txBox="1"/>
-          <p:nvPr/>
-        </p:nvSpPr>
-        <p:spPr>
-          <a:xfrm>
-            <a:off x="1481328" y="1335024"/>
-            <a:ext cx="2468880" cy="256032"/>
-          </a:xfrm>
-          <a:prstGeom prst="rect">
-            <a:avLst/>
-          </a:prstGeom>
-          <a:noFill/>
-        </p:spPr>
-        <p:txBody>
-          <a:bodyPr wrap="square" anchor="t" lIns="0" rIns="0" tIns="0" bIns="0">
-            <a:spAutoFit/>
-          </a:bodyPr>
-          <a:lstStyle/>
-          <a:p>
-            <a:pPr algn="l">
-              <a:lnSpc>
-                <a:spcPct val="115000"/>
-              </a:lnSpc>
-              <a:spcAft>
-                <a:spcPts val="400"/>
-              </a:spcAft>
-            </a:pPr>
-            <a:r>
-              <a:rPr sz="1350" b="1">
-                <a:solidFill>
-                  <a:srgbClr val="0C2D48"/>
-                </a:solidFill>
-                <a:latin typeface="Noto Looped Thai"/>
-              </a:rPr>
-              <a:t>แอปที่ติดตั้งได้จริง</a:t>
-            </a:r>
-          </a:p>
-        </p:txBody>
-      </p:sp>
-      <p:sp>
-        <p:nvSpPr>
-          <p:cNvPr id="12" name="TextBox 11"/>
-          <p:cNvSpPr txBox="1"/>
-          <p:nvPr/>
-        </p:nvSpPr>
-        <p:spPr>
-          <a:xfrm>
-            <a:off x="4023360" y="1316736"/>
-            <a:ext cx="3749039" cy="548640"/>
-          </a:xfrm>
-          <a:prstGeom prst="rect">
-            <a:avLst/>
-          </a:prstGeom>
-          <a:noFill/>
-        </p:spPr>
-        <p:txBody>
-          <a:bodyPr wrap="square" anchor="t" lIns="0" rIns="0" tIns="0" bIns="0">
-            <a:spAutoFit/>
-          </a:bodyPr>
-          <a:lstStyle/>
-          <a:p>
-            <a:pPr algn="l">
-              <a:lnSpc>
-                <a:spcPct val="125000"/>
-              </a:lnSpc>
-              <a:spcAft>
-                <a:spcPts val="400"/>
-              </a:spcAft>
-            </a:pPr>
-            <a:r>
-              <a:rPr sz="1100" b="0">
-                <a:solidFill>
-                  <a:srgbClr val="1F2937"/>
-                </a:solidFill>
-                <a:latin typeface="Noto Looped Thai"/>
-              </a:rPr>
-              <a:t>app-release.apk ขนาด 63.8 MB · ติดตั้งบนมือถือ Android</a:t>
-            </a:r>
-          </a:p>
-        </p:txBody>
-      </p:sp>
-      <p:sp>
-        <p:nvSpPr>
-          <p:cNvPr id="13" name="Rounded Rectangle 12"/>
-          <p:cNvSpPr/>
-          <p:nvPr/>
-        </p:nvSpPr>
-        <p:spPr>
-          <a:xfrm>
-            <a:off x="777240" y="2029967"/>
-            <a:ext cx="475488" cy="475488"/>
-          </a:xfrm>
-          <a:prstGeom prst="roundRect">
-            <a:avLst>
-              <a:gd name="adj" fmla="val 20000"/>
-            </a:avLst>
-          </a:prstGeom>
-          <a:solidFill>
-            <a:srgbClr val="2F855A"/>
-          </a:solidFill>
-          <a:ln w="9525">
-            <a:solidFill>
-              <a:srgbClr val="2F855A"/>
-            </a:solidFill>
-          </a:ln>
-          <a:effectLst/>
-        </p:spPr>
-        <p:style>
-          <a:lnRef idx="1">
-            <a:schemeClr val="accent1"/>
-          </a:lnRef>
-          <a:fillRef idx="3">
-            <a:schemeClr val="accent1"/>
-          </a:fillRef>
-          <a:effectRef idx="2">
-            <a:schemeClr val="accent1"/>
-          </a:effectRef>
-          <a:fontRef idx="minor">
-            <a:schemeClr val="lt1"/>
-          </a:fontRef>
-        </p:style>
-        <p:txBody>
-          <a:bodyPr rtlCol="0" anchor="ctr"/>
-          <a:lstStyle/>
-          <a:p/>
-        </p:txBody>
-      </p:sp>
-      <p:sp>
-        <p:nvSpPr>
-          <p:cNvPr id="14" name="TextBox 13"/>
-          <p:cNvSpPr txBox="1"/>
-          <p:nvPr/>
-        </p:nvSpPr>
-        <p:spPr>
-          <a:xfrm>
-            <a:off x="777240" y="2130551"/>
-            <a:ext cx="475488" cy="274320"/>
-          </a:xfrm>
-          <a:prstGeom prst="rect">
-            <a:avLst/>
-          </a:prstGeom>
-          <a:noFill/>
-        </p:spPr>
-        <p:txBody>
-          <a:bodyPr wrap="square" anchor="t" lIns="0" rIns="0" tIns="0" bIns="0">
-            <a:spAutoFit/>
-          </a:bodyPr>
-          <a:lstStyle/>
-          <a:p>
-            <a:pPr algn="ctr">
-              <a:lnSpc>
-                <a:spcPct val="115000"/>
-              </a:lnSpc>
-              <a:spcAft>
-                <a:spcPts val="400"/>
-              </a:spcAft>
-            </a:pPr>
-            <a:r>
-              <a:rPr sz="1800" b="1">
-                <a:solidFill>
-                  <a:srgbClr val="FFFFFF"/>
-                </a:solidFill>
-                <a:latin typeface="Arial"/>
-              </a:rPr>
-              <a:t>✓</a:t>
-            </a:r>
-          </a:p>
-        </p:txBody>
-      </p:sp>
-      <p:sp>
-        <p:nvSpPr>
-          <p:cNvPr id="15" name="TextBox 14"/>
-          <p:cNvSpPr txBox="1"/>
-          <p:nvPr/>
-        </p:nvSpPr>
-        <p:spPr>
-          <a:xfrm>
-            <a:off x="1481328" y="2066543"/>
-            <a:ext cx="2468880" cy="256032"/>
-          </a:xfrm>
-          <a:prstGeom prst="rect">
-            <a:avLst/>
-          </a:prstGeom>
-          <a:noFill/>
-        </p:spPr>
-        <p:txBody>
-          <a:bodyPr wrap="square" anchor="t" lIns="0" rIns="0" tIns="0" bIns="0">
-            <a:spAutoFit/>
-          </a:bodyPr>
-          <a:lstStyle/>
-          <a:p>
-            <a:pPr algn="l">
-              <a:lnSpc>
-                <a:spcPct val="115000"/>
-              </a:lnSpc>
-              <a:spcAft>
-                <a:spcPts val="400"/>
-              </a:spcAft>
-            </a:pPr>
-            <a:r>
-              <a:rPr sz="1350" b="1">
-                <a:solidFill>
-                  <a:srgbClr val="0C2D48"/>
-                </a:solidFill>
-                <a:latin typeface="Noto Looped Thai"/>
-              </a:rPr>
-              <a:t>Source Code</a:t>
-            </a:r>
-          </a:p>
-        </p:txBody>
-      </p:sp>
-      <p:sp>
-        <p:nvSpPr>
-          <p:cNvPr id="16" name="TextBox 15"/>
-          <p:cNvSpPr txBox="1"/>
-          <p:nvPr/>
-        </p:nvSpPr>
-        <p:spPr>
-          <a:xfrm>
-            <a:off x="4023360" y="2048255"/>
-            <a:ext cx="3749039" cy="548640"/>
-          </a:xfrm>
-          <a:prstGeom prst="rect">
-            <a:avLst/>
-          </a:prstGeom>
-          <a:noFill/>
-        </p:spPr>
-        <p:txBody>
-          <a:bodyPr wrap="square" anchor="t" lIns="0" rIns="0" tIns="0" bIns="0">
-            <a:spAutoFit/>
-          </a:bodyPr>
-          <a:lstStyle/>
-          <a:p>
-            <a:pPr algn="l">
-              <a:lnSpc>
-                <a:spcPct val="125000"/>
-              </a:lnSpc>
-              <a:spcAft>
-                <a:spcPts val="400"/>
-              </a:spcAft>
-            </a:pPr>
-            <a:r>
-              <a:rPr sz="1100" b="0">
-                <a:solidFill>
-                  <a:srgbClr val="1F2937"/>
-                </a:solidFill>
-                <a:latin typeface="Noto Looped Thai"/>
-              </a:rPr>
-              <a:t>Git 25 commit · โค้ดที่เขียนเอง 56 ไฟล์ Dart รวม 7,589 บรรทัด</a:t>
-            </a:r>
-          </a:p>
-        </p:txBody>
-      </p:sp>
-      <p:sp>
-        <p:nvSpPr>
-          <p:cNvPr id="17" name="Rounded Rectangle 16"/>
-          <p:cNvSpPr/>
-          <p:nvPr/>
-        </p:nvSpPr>
-        <p:spPr>
-          <a:xfrm>
-            <a:off x="777240" y="2761488"/>
-            <a:ext cx="475488" cy="475488"/>
-          </a:xfrm>
-          <a:prstGeom prst="roundRect">
-            <a:avLst>
-              <a:gd name="adj" fmla="val 20000"/>
-            </a:avLst>
-          </a:prstGeom>
-          <a:solidFill>
-            <a:srgbClr val="2F855A"/>
-          </a:solidFill>
-          <a:ln w="9525">
-            <a:solidFill>
-              <a:srgbClr val="2F855A"/>
-            </a:solidFill>
-          </a:ln>
-          <a:effectLst/>
-        </p:spPr>
-        <p:style>
-          <a:lnRef idx="1">
-            <a:schemeClr val="accent1"/>
-          </a:lnRef>
-          <a:fillRef idx="3">
-            <a:schemeClr val="accent1"/>
-          </a:fillRef>
-          <a:effectRef idx="2">
-            <a:schemeClr val="accent1"/>
-          </a:effectRef>
-          <a:fontRef idx="minor">
-            <a:schemeClr val="lt1"/>
-          </a:fontRef>
-        </p:style>
-        <p:txBody>
-          <a:bodyPr rtlCol="0" anchor="ctr"/>
-          <a:lstStyle/>
-          <a:p/>
-        </p:txBody>
-      </p:sp>
-      <p:sp>
-        <p:nvSpPr>
-          <p:cNvPr id="18" name="TextBox 17"/>
-          <p:cNvSpPr txBox="1"/>
-          <p:nvPr/>
-        </p:nvSpPr>
-        <p:spPr>
-          <a:xfrm>
-            <a:off x="777240" y="2862072"/>
-            <a:ext cx="475488" cy="274320"/>
-          </a:xfrm>
-          <a:prstGeom prst="rect">
-            <a:avLst/>
-          </a:prstGeom>
-          <a:noFill/>
-        </p:spPr>
-        <p:txBody>
-          <a:bodyPr wrap="square" anchor="t" lIns="0" rIns="0" tIns="0" bIns="0">
-            <a:spAutoFit/>
-          </a:bodyPr>
-          <a:lstStyle/>
-          <a:p>
-            <a:pPr algn="ctr">
-              <a:lnSpc>
-                <a:spcPct val="115000"/>
-              </a:lnSpc>
-              <a:spcAft>
-                <a:spcPts val="400"/>
-              </a:spcAft>
-            </a:pPr>
-            <a:r>
-              <a:rPr sz="1800" b="1">
-                <a:solidFill>
-                  <a:srgbClr val="FFFFFF"/>
-                </a:solidFill>
-                <a:latin typeface="Arial"/>
-              </a:rPr>
-              <a:t>✓</a:t>
-            </a:r>
-          </a:p>
-        </p:txBody>
-      </p:sp>
-      <p:sp>
-        <p:nvSpPr>
-          <p:cNvPr id="19" name="TextBox 18"/>
-          <p:cNvSpPr txBox="1"/>
-          <p:nvPr/>
-        </p:nvSpPr>
-        <p:spPr>
-          <a:xfrm>
-            <a:off x="1481328" y="2798064"/>
-            <a:ext cx="2468880" cy="256032"/>
-          </a:xfrm>
-          <a:prstGeom prst="rect">
-            <a:avLst/>
-          </a:prstGeom>
-          <a:noFill/>
-        </p:spPr>
-        <p:txBody>
-          <a:bodyPr wrap="square" anchor="t" lIns="0" rIns="0" tIns="0" bIns="0">
-            <a:spAutoFit/>
-          </a:bodyPr>
-          <a:lstStyle/>
-          <a:p>
-            <a:pPr algn="l">
-              <a:lnSpc>
-                <a:spcPct val="115000"/>
-              </a:lnSpc>
-              <a:spcAft>
-                <a:spcPts val="400"/>
-              </a:spcAft>
-            </a:pPr>
-            <a:r>
-              <a:rPr sz="1350" b="1">
-                <a:solidFill>
-                  <a:srgbClr val="0C2D48"/>
-                </a:solidFill>
-                <a:latin typeface="Noto Looped Thai"/>
-              </a:rPr>
-              <a:t>ฐานข้อมูล / โครงสร้าง</a:t>
-            </a:r>
-          </a:p>
-        </p:txBody>
-      </p:sp>
-      <p:sp>
-        <p:nvSpPr>
-          <p:cNvPr id="20" name="TextBox 19"/>
-          <p:cNvSpPr txBox="1"/>
-          <p:nvPr/>
-        </p:nvSpPr>
-        <p:spPr>
-          <a:xfrm>
-            <a:off x="4023360" y="2779776"/>
-            <a:ext cx="3749039" cy="548640"/>
-          </a:xfrm>
-          <a:prstGeom prst="rect">
-            <a:avLst/>
-          </a:prstGeom>
-          <a:noFill/>
-        </p:spPr>
-        <p:txBody>
-          <a:bodyPr wrap="square" anchor="t" lIns="0" rIns="0" tIns="0" bIns="0">
-            <a:spAutoFit/>
-          </a:bodyPr>
-          <a:lstStyle/>
-          <a:p>
-            <a:pPr algn="l">
-              <a:lnSpc>
-                <a:spcPct val="125000"/>
-              </a:lnSpc>
-              <a:spcAft>
-                <a:spcPts val="400"/>
-              </a:spcAft>
-            </a:pPr>
-            <a:r>
-              <a:rPr sz="1100" b="0">
-                <a:solidFill>
-                  <a:srgbClr val="1F2937"/>
-                </a:solidFill>
-                <a:latin typeface="Noto Looped Thai"/>
-              </a:rPr>
-              <a:t>SQLite ในเครื่อง 3 ตาราง · คลาวด์ 5 ตาราง + 15 ฟังก์ชัน</a:t>
-            </a:r>
-          </a:p>
-        </p:txBody>
-      </p:sp>
-      <p:sp>
-        <p:nvSpPr>
-          <p:cNvPr id="21" name="Rounded Rectangle 20"/>
-          <p:cNvSpPr/>
-          <p:nvPr/>
-        </p:nvSpPr>
-        <p:spPr>
-          <a:xfrm>
-            <a:off x="777240" y="3493008"/>
-            <a:ext cx="475488" cy="475488"/>
-          </a:xfrm>
-          <a:prstGeom prst="roundRect">
-            <a:avLst>
-              <a:gd name="adj" fmla="val 20000"/>
-            </a:avLst>
-          </a:prstGeom>
-          <a:solidFill>
-            <a:srgbClr val="2F855A"/>
-          </a:solidFill>
-          <a:ln w="9525">
-            <a:solidFill>
-              <a:srgbClr val="2F855A"/>
-            </a:solidFill>
-          </a:ln>
-          <a:effectLst/>
-        </p:spPr>
-        <p:style>
-          <a:lnRef idx="1">
-            <a:schemeClr val="accent1"/>
-          </a:lnRef>
-          <a:fillRef idx="3">
-            <a:schemeClr val="accent1"/>
-          </a:fillRef>
-          <a:effectRef idx="2">
-            <a:schemeClr val="accent1"/>
-          </a:effectRef>
-          <a:fontRef idx="minor">
-            <a:schemeClr val="lt1"/>
-          </a:fontRef>
-        </p:style>
-        <p:txBody>
-          <a:bodyPr rtlCol="0" anchor="ctr"/>
-          <a:lstStyle/>
-          <a:p/>
-        </p:txBody>
-      </p:sp>
-      <p:sp>
-        <p:nvSpPr>
-          <p:cNvPr id="22" name="TextBox 21"/>
-          <p:cNvSpPr txBox="1"/>
-          <p:nvPr/>
-        </p:nvSpPr>
-        <p:spPr>
-          <a:xfrm>
-            <a:off x="777240" y="3593592"/>
-            <a:ext cx="475488" cy="274320"/>
-          </a:xfrm>
-          <a:prstGeom prst="rect">
-            <a:avLst/>
-          </a:prstGeom>
-          <a:noFill/>
-        </p:spPr>
-        <p:txBody>
-          <a:bodyPr wrap="square" anchor="t" lIns="0" rIns="0" tIns="0" bIns="0">
-            <a:spAutoFit/>
-          </a:bodyPr>
-          <a:lstStyle/>
-          <a:p>
-            <a:pPr algn="ctr">
-              <a:lnSpc>
-                <a:spcPct val="115000"/>
-              </a:lnSpc>
-              <a:spcAft>
-                <a:spcPts val="400"/>
-              </a:spcAft>
-            </a:pPr>
-            <a:r>
-              <a:rPr sz="1800" b="1">
-                <a:solidFill>
-                  <a:srgbClr val="FFFFFF"/>
-                </a:solidFill>
-                <a:latin typeface="Arial"/>
-              </a:rPr>
-              <a:t>✓</a:t>
-            </a:r>
-          </a:p>
-        </p:txBody>
-      </p:sp>
-      <p:sp>
-        <p:nvSpPr>
-          <p:cNvPr id="23" name="TextBox 22"/>
-          <p:cNvSpPr txBox="1"/>
-          <p:nvPr/>
-        </p:nvSpPr>
-        <p:spPr>
-          <a:xfrm>
-            <a:off x="1481328" y="3529584"/>
-            <a:ext cx="2468880" cy="256032"/>
-          </a:xfrm>
-          <a:prstGeom prst="rect">
-            <a:avLst/>
-          </a:prstGeom>
-          <a:noFill/>
-        </p:spPr>
-        <p:txBody>
-          <a:bodyPr wrap="square" anchor="t" lIns="0" rIns="0" tIns="0" bIns="0">
-            <a:spAutoFit/>
-          </a:bodyPr>
-          <a:lstStyle/>
-          <a:p>
-            <a:pPr algn="l">
-              <a:lnSpc>
-                <a:spcPct val="115000"/>
-              </a:lnSpc>
-              <a:spcAft>
-                <a:spcPts val="400"/>
-              </a:spcAft>
-            </a:pPr>
-            <a:r>
-              <a:rPr sz="1350" b="1">
-                <a:solidFill>
-                  <a:srgbClr val="0C2D48"/>
-                </a:solidFill>
-                <a:latin typeface="Noto Looped Thai"/>
-              </a:rPr>
-              <a:t>สคริปต์ติดตั้งเซิร์ฟเวอร์</a:t>
-            </a:r>
-          </a:p>
-        </p:txBody>
-      </p:sp>
-      <p:sp>
-        <p:nvSpPr>
-          <p:cNvPr id="24" name="TextBox 23"/>
-          <p:cNvSpPr txBox="1"/>
-          <p:nvPr/>
-        </p:nvSpPr>
-        <p:spPr>
-          <a:xfrm>
-            <a:off x="4023360" y="3511296"/>
-            <a:ext cx="3749039" cy="548640"/>
-          </a:xfrm>
-          <a:prstGeom prst="rect">
-            <a:avLst/>
-          </a:prstGeom>
-          <a:noFill/>
-        </p:spPr>
-        <p:txBody>
-          <a:bodyPr wrap="square" anchor="t" lIns="0" rIns="0" tIns="0" bIns="0">
-            <a:spAutoFit/>
-          </a:bodyPr>
-          <a:lstStyle/>
-          <a:p>
-            <a:pPr algn="l">
-              <a:lnSpc>
-                <a:spcPct val="125000"/>
-              </a:lnSpc>
-              <a:spcAft>
-                <a:spcPts val="400"/>
-              </a:spcAft>
-            </a:pPr>
-            <a:r>
-              <a:rPr sz="1100" b="0">
-                <a:solidFill>
-                  <a:srgbClr val="1F2937"/>
-                </a:solidFill>
-                <a:latin typeface="Noto Looped Thai"/>
-              </a:rPr>
-              <a:t>ไฟล์ SQL ในโฟลเดอร์ supabase/ รันซ้ำได้ไม่ทำข้อมูลเสีย</a:t>
-            </a:r>
-          </a:p>
-        </p:txBody>
-      </p:sp>
-      <p:sp>
-        <p:nvSpPr>
-          <p:cNvPr id="25" name="Rounded Rectangle 24"/>
-          <p:cNvSpPr/>
-          <p:nvPr/>
-        </p:nvSpPr>
-        <p:spPr>
-          <a:xfrm>
-            <a:off x="777240" y="4224528"/>
-            <a:ext cx="475488" cy="475488"/>
-          </a:xfrm>
-          <a:prstGeom prst="roundRect">
-            <a:avLst>
-              <a:gd name="adj" fmla="val 20000"/>
-            </a:avLst>
-          </a:prstGeom>
-          <a:solidFill>
-            <a:srgbClr val="2F855A"/>
-          </a:solidFill>
-          <a:ln w="9525">
-            <a:solidFill>
-              <a:srgbClr val="2F855A"/>
-            </a:solidFill>
-          </a:ln>
-          <a:effectLst/>
-        </p:spPr>
-        <p:style>
-          <a:lnRef idx="1">
-            <a:schemeClr val="accent1"/>
-          </a:lnRef>
-          <a:fillRef idx="3">
-            <a:schemeClr val="accent1"/>
-          </a:fillRef>
-          <a:effectRef idx="2">
-            <a:schemeClr val="accent1"/>
-          </a:effectRef>
-          <a:fontRef idx="minor">
-            <a:schemeClr val="lt1"/>
-          </a:fontRef>
-        </p:style>
-        <p:txBody>
-          <a:bodyPr rtlCol="0" anchor="ctr"/>
-          <a:lstStyle/>
-          <a:p/>
-        </p:txBody>
-      </p:sp>
-      <p:sp>
-        <p:nvSpPr>
-          <p:cNvPr id="26" name="TextBox 25"/>
-          <p:cNvSpPr txBox="1"/>
-          <p:nvPr/>
-        </p:nvSpPr>
-        <p:spPr>
-          <a:xfrm>
-            <a:off x="777240" y="4325112"/>
-            <a:ext cx="475488" cy="274320"/>
-          </a:xfrm>
-          <a:prstGeom prst="rect">
-            <a:avLst/>
-          </a:prstGeom>
-          <a:noFill/>
-        </p:spPr>
-        <p:txBody>
-          <a:bodyPr wrap="square" anchor="t" lIns="0" rIns="0" tIns="0" bIns="0">
-            <a:spAutoFit/>
-          </a:bodyPr>
-          <a:lstStyle/>
-          <a:p>
-            <a:pPr algn="ctr">
-              <a:lnSpc>
-                <a:spcPct val="115000"/>
-              </a:lnSpc>
-              <a:spcAft>
-                <a:spcPts val="400"/>
-              </a:spcAft>
-            </a:pPr>
-            <a:r>
-              <a:rPr sz="1800" b="1">
-                <a:solidFill>
-                  <a:srgbClr val="FFFFFF"/>
-                </a:solidFill>
-                <a:latin typeface="Arial"/>
-              </a:rPr>
-              <a:t>✓</a:t>
-            </a:r>
-          </a:p>
-        </p:txBody>
-      </p:sp>
-      <p:sp>
-        <p:nvSpPr>
-          <p:cNvPr id="27" name="TextBox 26"/>
-          <p:cNvSpPr txBox="1"/>
-          <p:nvPr/>
-        </p:nvSpPr>
-        <p:spPr>
-          <a:xfrm>
-            <a:off x="1481328" y="4261104"/>
-            <a:ext cx="2468880" cy="256032"/>
-          </a:xfrm>
-          <a:prstGeom prst="rect">
-            <a:avLst/>
-          </a:prstGeom>
-          <a:noFill/>
-        </p:spPr>
-        <p:txBody>
-          <a:bodyPr wrap="square" anchor="t" lIns="0" rIns="0" tIns="0" bIns="0">
-            <a:spAutoFit/>
-          </a:bodyPr>
-          <a:lstStyle/>
-          <a:p>
-            <a:pPr algn="l">
-              <a:lnSpc>
-                <a:spcPct val="115000"/>
-              </a:lnSpc>
-              <a:spcAft>
-                <a:spcPts val="400"/>
-              </a:spcAft>
-            </a:pPr>
-            <a:r>
-              <a:rPr sz="1350" b="1">
-                <a:solidFill>
-                  <a:srgbClr val="0C2D48"/>
-                </a:solidFill>
-                <a:latin typeface="Noto Looped Thai"/>
-              </a:rPr>
-              <a:t>เอกสารโครงงาน</a:t>
-            </a:r>
-          </a:p>
-        </p:txBody>
-      </p:sp>
-      <p:sp>
-        <p:nvSpPr>
-          <p:cNvPr id="28" name="TextBox 27"/>
-          <p:cNvSpPr txBox="1"/>
-          <p:nvPr/>
-        </p:nvSpPr>
-        <p:spPr>
-          <a:xfrm>
-            <a:off x="4023360" y="4242816"/>
-            <a:ext cx="3749039" cy="548640"/>
-          </a:xfrm>
-          <a:prstGeom prst="rect">
-            <a:avLst/>
-          </a:prstGeom>
-          <a:noFill/>
-        </p:spPr>
-        <p:txBody>
-          <a:bodyPr wrap="square" anchor="t" lIns="0" rIns="0" tIns="0" bIns="0">
-            <a:spAutoFit/>
-          </a:bodyPr>
-          <a:lstStyle/>
-          <a:p>
-            <a:pPr algn="l">
-              <a:lnSpc>
-                <a:spcPct val="125000"/>
-              </a:lnSpc>
-              <a:spcAft>
-                <a:spcPts val="400"/>
-              </a:spcAft>
-            </a:pPr>
-            <a:r>
-              <a:rPr sz="1100" b="0">
-                <a:solidFill>
-                  <a:srgbClr val="1F2937"/>
-                </a:solidFill>
-                <a:latin typeface="Noto Looped Thai"/>
-              </a:rPr>
-              <a:t>คู่มือติดตั้ง SETUP.md · README · เอกสารนำเสนอชุดนี้</a:t>
-            </a:r>
-          </a:p>
-        </p:txBody>
-      </p:sp>
-      <p:sp>
-        <p:nvSpPr>
-          <p:cNvPr id="29" name="Rounded Rectangle 28"/>
-          <p:cNvSpPr/>
-          <p:nvPr/>
-        </p:nvSpPr>
-        <p:spPr>
-          <a:xfrm>
-            <a:off x="777240" y="4956048"/>
-            <a:ext cx="475488" cy="475488"/>
-          </a:xfrm>
-          <a:prstGeom prst="roundRect">
-            <a:avLst>
-              <a:gd name="adj" fmla="val 20000"/>
-            </a:avLst>
-          </a:prstGeom>
-          <a:solidFill>
-            <a:srgbClr val="2F855A"/>
-          </a:solidFill>
-          <a:ln w="9525">
-            <a:solidFill>
-              <a:srgbClr val="2F855A"/>
-            </a:solidFill>
-          </a:ln>
-          <a:effectLst/>
-        </p:spPr>
-        <p:style>
-          <a:lnRef idx="1">
-            <a:schemeClr val="accent1"/>
-          </a:lnRef>
-          <a:fillRef idx="3">
-            <a:schemeClr val="accent1"/>
-          </a:fillRef>
-          <a:effectRef idx="2">
-            <a:schemeClr val="accent1"/>
-          </a:effectRef>
-          <a:fontRef idx="minor">
-            <a:schemeClr val="lt1"/>
-          </a:fontRef>
-        </p:style>
-        <p:txBody>
-          <a:bodyPr rtlCol="0" anchor="ctr"/>
-          <a:lstStyle/>
-          <a:p/>
-        </p:txBody>
-      </p:sp>
-      <p:sp>
-        <p:nvSpPr>
-          <p:cNvPr id="30" name="TextBox 29"/>
-          <p:cNvSpPr txBox="1"/>
-          <p:nvPr/>
-        </p:nvSpPr>
-        <p:spPr>
-          <a:xfrm>
-            <a:off x="777240" y="5056632"/>
-            <a:ext cx="475488" cy="274320"/>
-          </a:xfrm>
-          <a:prstGeom prst="rect">
-            <a:avLst/>
-          </a:prstGeom>
-          <a:noFill/>
-        </p:spPr>
-        <p:txBody>
-          <a:bodyPr wrap="square" anchor="t" lIns="0" rIns="0" tIns="0" bIns="0">
-            <a:spAutoFit/>
-          </a:bodyPr>
-          <a:lstStyle/>
-          <a:p>
-            <a:pPr algn="ctr">
-              <a:lnSpc>
-                <a:spcPct val="115000"/>
-              </a:lnSpc>
-              <a:spcAft>
-                <a:spcPts val="400"/>
-              </a:spcAft>
-            </a:pPr>
-            <a:r>
-              <a:rPr sz="1800" b="1">
-                <a:solidFill>
-                  <a:srgbClr val="FFFFFF"/>
-                </a:solidFill>
-                <a:latin typeface="Arial"/>
-              </a:rPr>
-              <a:t>✓</a:t>
-            </a:r>
-          </a:p>
-        </p:txBody>
-      </p:sp>
-      <p:sp>
-        <p:nvSpPr>
-          <p:cNvPr id="31" name="TextBox 30"/>
-          <p:cNvSpPr txBox="1"/>
-          <p:nvPr/>
-        </p:nvSpPr>
-        <p:spPr>
-          <a:xfrm>
-            <a:off x="1481328" y="4992624"/>
-            <a:ext cx="2468880" cy="256032"/>
-          </a:xfrm>
-          <a:prstGeom prst="rect">
-            <a:avLst/>
-          </a:prstGeom>
-          <a:noFill/>
-        </p:spPr>
-        <p:txBody>
-          <a:bodyPr wrap="square" anchor="t" lIns="0" rIns="0" tIns="0" bIns="0">
-            <a:spAutoFit/>
-          </a:bodyPr>
-          <a:lstStyle/>
-          <a:p>
-            <a:pPr algn="l">
-              <a:lnSpc>
-                <a:spcPct val="115000"/>
-              </a:lnSpc>
-              <a:spcAft>
-                <a:spcPts val="400"/>
-              </a:spcAft>
-            </a:pPr>
-            <a:r>
-              <a:rPr sz="1350" b="1">
-                <a:solidFill>
-                  <a:srgbClr val="0C2D48"/>
-                </a:solidFill>
-                <a:latin typeface="Noto Looped Thai"/>
-              </a:rPr>
-              <a:t>หลักฐานทดสอบ</a:t>
-            </a:r>
-          </a:p>
-        </p:txBody>
-      </p:sp>
-      <p:sp>
-        <p:nvSpPr>
-          <p:cNvPr id="32" name="TextBox 31"/>
-          <p:cNvSpPr txBox="1"/>
-          <p:nvPr/>
-        </p:nvSpPr>
-        <p:spPr>
-          <a:xfrm>
-            <a:off x="4023360" y="4974336"/>
-            <a:ext cx="3749039" cy="548640"/>
-          </a:xfrm>
-          <a:prstGeom prst="rect">
-            <a:avLst/>
-          </a:prstGeom>
-          <a:noFill/>
-        </p:spPr>
-        <p:txBody>
-          <a:bodyPr wrap="square" anchor="t" lIns="0" rIns="0" tIns="0" bIns="0">
-            <a:spAutoFit/>
-          </a:bodyPr>
-          <a:lstStyle/>
-          <a:p>
-            <a:pPr algn="l">
-              <a:lnSpc>
-                <a:spcPct val="125000"/>
-              </a:lnSpc>
-              <a:spcAft>
-                <a:spcPts val="400"/>
-              </a:spcAft>
-            </a:pPr>
-            <a:r>
-              <a:rPr sz="1100" b="0">
-                <a:solidFill>
-                  <a:srgbClr val="1F2937"/>
-                </a:solidFill>
-                <a:latin typeface="Noto Looped Thai"/>
-              </a:rPr>
-              <a:t>ผล flutter test 105 กรณี · ภาพหน้าจอผลทดสอบทุกขั้น</a:t>
-            </a:r>
-          </a:p>
-        </p:txBody>
-      </p:sp>
-      <p:sp>
-        <p:nvSpPr>
-          <p:cNvPr id="33" name="Rounded Rectangle 32"/>
-          <p:cNvSpPr/>
-          <p:nvPr/>
-        </p:nvSpPr>
-        <p:spPr>
-          <a:xfrm>
-            <a:off x="7973568" y="1389888"/>
-            <a:ext cx="9074624" cy="3072384"/>
+            <a:off x="640080" y="1280160"/>
+            <a:ext cx="5349240" cy="2697480"/>
           </a:xfrm>
           <a:prstGeom prst="roundRect">
             <a:avLst>
@@ -10645,53 +9848,73 @@
           <a:p/>
         </p:txBody>
       </p:sp>
-      <p:pic>
-        <p:nvPicPr>
-          <p:cNvPr id="34" name="Picture 33" descr="03_evidence_test.png"/>
-          <p:cNvPicPr>
-            <a:picLocks noChangeAspect="1"/>
-          </p:cNvPicPr>
-          <p:nvPr/>
-        </p:nvPicPr>
-        <p:blipFill>
-          <a:blip r:embed="rId2"/>
-          <a:stretch>
-            <a:fillRect/>
-          </a:stretch>
-        </p:blipFill>
-        <p:spPr>
-          <a:xfrm>
-            <a:off x="8001000" y="1417320"/>
-            <a:ext cx="9019760" cy="3017520"/>
-          </a:xfrm>
-          <a:prstGeom prst="rect">
-            <a:avLst/>
-          </a:prstGeom>
-        </p:spPr>
-      </p:pic>
-      <p:sp>
-        <p:nvSpPr>
-          <p:cNvPr id="35" name="TextBox 34"/>
-          <p:cNvSpPr txBox="1"/>
-          <p:nvPr/>
-        </p:nvSpPr>
-        <p:spPr>
-          <a:xfrm>
-            <a:off x="7955279" y="4617720"/>
-            <a:ext cx="3611880" cy="274320"/>
-          </a:xfrm>
-          <a:prstGeom prst="rect">
-            <a:avLst/>
-          </a:prstGeom>
-          <a:noFill/>
-        </p:spPr>
-        <p:txBody>
-          <a:bodyPr wrap="square" anchor="t" lIns="0" rIns="0" tIns="0" bIns="0">
-            <a:spAutoFit/>
-          </a:bodyPr>
-          <a:lstStyle/>
-          <a:p>
-            <a:pPr algn="ctr">
+      <p:sp>
+        <p:nvSpPr>
+          <p:cNvPr id="10" name="Rectangle 9"/>
+          <p:cNvSpPr/>
+          <p:nvPr/>
+        </p:nvSpPr>
+        <p:spPr>
+          <a:xfrm>
+            <a:off x="640080" y="1280160"/>
+            <a:ext cx="54864" cy="2697480"/>
+          </a:xfrm>
+          <a:prstGeom prst="rect">
+            <a:avLst/>
+          </a:prstGeom>
+          <a:solidFill>
+            <a:srgbClr val="2E8B8B"/>
+          </a:solidFill>
+          <a:ln w="9525">
+            <a:solidFill>
+              <a:srgbClr val="2E8B8B"/>
+            </a:solidFill>
+          </a:ln>
+          <a:effectLst/>
+        </p:spPr>
+        <p:style>
+          <a:lnRef idx="1">
+            <a:schemeClr val="accent1"/>
+          </a:lnRef>
+          <a:fillRef idx="3">
+            <a:schemeClr val="accent1"/>
+          </a:fillRef>
+          <a:effectRef idx="2">
+            <a:schemeClr val="accent1"/>
+          </a:effectRef>
+          <a:fontRef idx="minor">
+            <a:schemeClr val="lt1"/>
+          </a:fontRef>
+        </p:style>
+        <p:txBody>
+          <a:bodyPr rtlCol="0" anchor="ctr"/>
+          <a:lstStyle/>
+          <a:p/>
+        </p:txBody>
+      </p:sp>
+      <p:sp>
+        <p:nvSpPr>
+          <p:cNvPr id="11" name="TextBox 10"/>
+          <p:cNvSpPr txBox="1"/>
+          <p:nvPr/>
+        </p:nvSpPr>
+        <p:spPr>
+          <a:xfrm>
+            <a:off x="868680" y="1499616"/>
+            <a:ext cx="4937759" cy="310896"/>
+          </a:xfrm>
+          <a:prstGeom prst="rect">
+            <a:avLst/>
+          </a:prstGeom>
+          <a:noFill/>
+        </p:spPr>
+        <p:txBody>
+          <a:bodyPr wrap="square" anchor="t" lIns="0" rIns="0" tIns="0" bIns="0">
+            <a:spAutoFit/>
+          </a:bodyPr>
+          <a:lstStyle/>
+          <a:p>
+            <a:pPr algn="l">
               <a:lnSpc>
                 <a:spcPct val="115000"/>
               </a:lnSpc>
@@ -10700,13 +9923,568 @@
               </a:spcAft>
             </a:pPr>
             <a:r>
-              <a:rPr sz="1100" b="1">
-                <a:solidFill>
-                  <a:srgbClr val="64748B"/>
-                </a:solidFill>
-                <a:latin typeface="Noto Looped Thai"/>
-              </a:rPr>
-              <a:t>ผลรัน flutter test จริง</a:t>
+              <a:rPr sz="1450" b="1">
+                <a:solidFill>
+                  <a:srgbClr val="0C2D48"/>
+                </a:solidFill>
+                <a:latin typeface="Noto Looped Thai"/>
+              </a:rPr>
+              <a:t>ส่วนขยายที่เพิ่มเสร็จแล้ว (22 ก.ย. 2569)</a:t>
+            </a:r>
+          </a:p>
+        </p:txBody>
+      </p:sp>
+      <p:sp>
+        <p:nvSpPr>
+          <p:cNvPr id="12" name="TextBox 11"/>
+          <p:cNvSpPr txBox="1"/>
+          <p:nvPr/>
+        </p:nvSpPr>
+        <p:spPr>
+          <a:xfrm>
+            <a:off x="868680" y="1993391"/>
+            <a:ext cx="4892040" cy="1828800"/>
+          </a:xfrm>
+          <a:prstGeom prst="rect">
+            <a:avLst/>
+          </a:prstGeom>
+          <a:noFill/>
+        </p:spPr>
+        <p:txBody>
+          <a:bodyPr wrap="square" anchor="t" lIns="0" rIns="0" tIns="0" bIns="0">
+            <a:spAutoFit/>
+          </a:bodyPr>
+          <a:lstStyle/>
+          <a:p>
+            <a:pPr algn="l">
+              <a:lnSpc>
+                <a:spcPct val="125000"/>
+              </a:lnSpc>
+              <a:spcAft>
+                <a:spcPts val="300"/>
+              </a:spcAft>
+            </a:pPr>
+            <a:r>
+              <a:rPr sz="1080" b="0">
+                <a:solidFill>
+                  <a:srgbClr val="1F2937"/>
+                </a:solidFill>
+                <a:latin typeface="Noto Looped Thai"/>
+              </a:rPr>
+              <a:t>✓ ลบ / พัก habit จากหน้าหลักด้วยการกดค้าง</a:t>
+            </a:r>
+          </a:p>
+          <a:p>
+            <a:pPr algn="l">
+              <a:lnSpc>
+                <a:spcPct val="125000"/>
+              </a:lnSpc>
+              <a:spcAft>
+                <a:spcPts val="300"/>
+              </a:spcAft>
+            </a:pPr>
+            <a:r>
+              <a:rPr sz="1080" b="0">
+                <a:solidFill>
+                  <a:srgbClr val="1F2937"/>
+                </a:solidFill>
+                <a:latin typeface="Noto Looped Thai"/>
+              </a:rPr>
+              <a:t>✓ ยุบเป็น 4 ด้าน: ร่างกาย · การกิน · การนอน · จิตใจ</a:t>
+            </a:r>
+          </a:p>
+          <a:p>
+            <a:pPr algn="l">
+              <a:lnSpc>
+                <a:spcPct val="125000"/>
+              </a:lnSpc>
+              <a:spcAft>
+                <a:spcPts val="300"/>
+              </a:spcAft>
+            </a:pPr>
+            <a:r>
+              <a:rPr sz="1080" b="0">
+                <a:solidFill>
+                  <a:srgbClr val="1F2937"/>
+                </a:solidFill>
+                <a:latin typeface="Noto Looped Thai"/>
+              </a:rPr>
+              <a:t>✓ habit แบบเลือก 3 ระดับ สำหรับด้านจิตใจ</a:t>
+            </a:r>
+          </a:p>
+          <a:p>
+            <a:pPr algn="l">
+              <a:lnSpc>
+                <a:spcPct val="125000"/>
+              </a:lnSpc>
+              <a:spcAft>
+                <a:spcPts val="300"/>
+              </a:spcAft>
+            </a:pPr>
+            <a:r>
+              <a:rPr sz="1080" b="0">
+                <a:solidFill>
+                  <a:srgbClr val="1F2937"/>
+                </a:solidFill>
+                <a:latin typeface="Noto Looped Thai"/>
+              </a:rPr>
+              <a:t>✓ คะแนนแรงค์ตามความต่อเนื่อง + ตราแรงค์ 5 ระดับ</a:t>
+            </a:r>
+          </a:p>
+          <a:p>
+            <a:pPr algn="l">
+              <a:lnSpc>
+                <a:spcPct val="125000"/>
+              </a:lnSpc>
+              <a:spcAft>
+                <a:spcPts val="300"/>
+              </a:spcAft>
+            </a:pPr>
+            <a:r>
+              <a:rPr sz="1080" b="0">
+                <a:solidFill>
+                  <a:srgbClr val="1F2937"/>
+                </a:solidFill>
+                <a:latin typeface="Noto Looped Thai"/>
+              </a:rPr>
+              <a:t>✓ popup แจ้งคะแนนทุกครั้งที่ได้แต้ม</a:t>
+            </a:r>
+          </a:p>
+          <a:p>
+            <a:pPr algn="l">
+              <a:lnSpc>
+                <a:spcPct val="125000"/>
+              </a:lnSpc>
+              <a:spcAft>
+                <a:spcPts val="300"/>
+              </a:spcAft>
+            </a:pPr>
+            <a:r>
+              <a:rPr sz="1080" b="0">
+                <a:solidFill>
+                  <a:srgbClr val="1F2937"/>
+                </a:solidFill>
+                <a:latin typeface="Noto Looped Thai"/>
+              </a:rPr>
+              <a:t>✓ กระดานอันดับรวม + เลือกดูแยกด้าน</a:t>
+            </a:r>
+          </a:p>
+        </p:txBody>
+      </p:sp>
+      <p:sp>
+        <p:nvSpPr>
+          <p:cNvPr id="13" name="Rounded Rectangle 12"/>
+          <p:cNvSpPr/>
+          <p:nvPr/>
+        </p:nvSpPr>
+        <p:spPr>
+          <a:xfrm>
+            <a:off x="6217920" y="1280160"/>
+            <a:ext cx="5349240" cy="2697480"/>
+          </a:xfrm>
+          <a:prstGeom prst="roundRect">
+            <a:avLst>
+              <a:gd name="adj" fmla="val 5000"/>
+            </a:avLst>
+          </a:prstGeom>
+          <a:solidFill>
+            <a:srgbClr val="FFFFFF"/>
+          </a:solidFill>
+          <a:ln w="9525">
+            <a:solidFill>
+              <a:srgbClr val="DDE3EA"/>
+            </a:solidFill>
+          </a:ln>
+          <a:effectLst/>
+        </p:spPr>
+        <p:style>
+          <a:lnRef idx="1">
+            <a:schemeClr val="accent1"/>
+          </a:lnRef>
+          <a:fillRef idx="3">
+            <a:schemeClr val="accent1"/>
+          </a:fillRef>
+          <a:effectRef idx="2">
+            <a:schemeClr val="accent1"/>
+          </a:effectRef>
+          <a:fontRef idx="minor">
+            <a:schemeClr val="lt1"/>
+          </a:fontRef>
+        </p:style>
+        <p:txBody>
+          <a:bodyPr rtlCol="0" anchor="ctr"/>
+          <a:lstStyle/>
+          <a:p/>
+        </p:txBody>
+      </p:sp>
+      <p:sp>
+        <p:nvSpPr>
+          <p:cNvPr id="14" name="Rectangle 13"/>
+          <p:cNvSpPr/>
+          <p:nvPr/>
+        </p:nvSpPr>
+        <p:spPr>
+          <a:xfrm>
+            <a:off x="6217920" y="1280160"/>
+            <a:ext cx="54864" cy="2697480"/>
+          </a:xfrm>
+          <a:prstGeom prst="rect">
+            <a:avLst/>
+          </a:prstGeom>
+          <a:solidFill>
+            <a:srgbClr val="D69E2E"/>
+          </a:solidFill>
+          <a:ln w="9525">
+            <a:solidFill>
+              <a:srgbClr val="D69E2E"/>
+            </a:solidFill>
+          </a:ln>
+          <a:effectLst/>
+        </p:spPr>
+        <p:style>
+          <a:lnRef idx="1">
+            <a:schemeClr val="accent1"/>
+          </a:lnRef>
+          <a:fillRef idx="3">
+            <a:schemeClr val="accent1"/>
+          </a:fillRef>
+          <a:effectRef idx="2">
+            <a:schemeClr val="accent1"/>
+          </a:effectRef>
+          <a:fontRef idx="minor">
+            <a:schemeClr val="lt1"/>
+          </a:fontRef>
+        </p:style>
+        <p:txBody>
+          <a:bodyPr rtlCol="0" anchor="ctr"/>
+          <a:lstStyle/>
+          <a:p/>
+        </p:txBody>
+      </p:sp>
+      <p:sp>
+        <p:nvSpPr>
+          <p:cNvPr id="15" name="TextBox 14"/>
+          <p:cNvSpPr txBox="1"/>
+          <p:nvPr/>
+        </p:nvSpPr>
+        <p:spPr>
+          <a:xfrm>
+            <a:off x="6446520" y="1499616"/>
+            <a:ext cx="4937759" cy="310896"/>
+          </a:xfrm>
+          <a:prstGeom prst="rect">
+            <a:avLst/>
+          </a:prstGeom>
+          <a:noFill/>
+        </p:spPr>
+        <p:txBody>
+          <a:bodyPr wrap="square" anchor="t" lIns="0" rIns="0" tIns="0" bIns="0">
+            <a:spAutoFit/>
+          </a:bodyPr>
+          <a:lstStyle/>
+          <a:p>
+            <a:pPr algn="l">
+              <a:lnSpc>
+                <a:spcPct val="115000"/>
+              </a:lnSpc>
+              <a:spcAft>
+                <a:spcPts val="400"/>
+              </a:spcAft>
+            </a:pPr>
+            <a:r>
+              <a:rPr sz="1450" b="1">
+                <a:solidFill>
+                  <a:srgbClr val="0C2D48"/>
+                </a:solidFill>
+                <a:latin typeface="Noto Looped Thai"/>
+              </a:rPr>
+              <a:t>ข้อจำกัดที่ยังเหลือ (ยังไม่ได้ทำ)</a:t>
+            </a:r>
+          </a:p>
+        </p:txBody>
+      </p:sp>
+      <p:sp>
+        <p:nvSpPr>
+          <p:cNvPr id="16" name="TextBox 15"/>
+          <p:cNvSpPr txBox="1"/>
+          <p:nvPr/>
+        </p:nvSpPr>
+        <p:spPr>
+          <a:xfrm>
+            <a:off x="6446520" y="1993391"/>
+            <a:ext cx="4892040" cy="1828800"/>
+          </a:xfrm>
+          <a:prstGeom prst="rect">
+            <a:avLst/>
+          </a:prstGeom>
+          <a:noFill/>
+        </p:spPr>
+        <p:txBody>
+          <a:bodyPr wrap="square" anchor="t" lIns="0" rIns="0" tIns="0" bIns="0">
+            <a:spAutoFit/>
+          </a:bodyPr>
+          <a:lstStyle/>
+          <a:p>
+            <a:pPr algn="l">
+              <a:lnSpc>
+                <a:spcPct val="125000"/>
+              </a:lnSpc>
+              <a:spcAft>
+                <a:spcPts val="300"/>
+              </a:spcAft>
+            </a:pPr>
+            <a:r>
+              <a:rPr sz="1080" b="0">
+                <a:solidFill>
+                  <a:srgbClr val="1F2937"/>
+                </a:solidFill>
+                <a:latin typeface="Noto Looped Thai"/>
+              </a:rPr>
+              <a:t>• ยังไม่ได้ทดสอบเสียงแจ้งเตือนเด้งบนมือถือจริง</a:t>
+            </a:r>
+          </a:p>
+          <a:p>
+            <a:pPr algn="l">
+              <a:lnSpc>
+                <a:spcPct val="125000"/>
+              </a:lnSpc>
+              <a:spcAft>
+                <a:spcPts val="300"/>
+              </a:spcAft>
+            </a:pPr>
+            <a:r>
+              <a:rPr sz="1080" b="0">
+                <a:solidFill>
+                  <a:srgbClr val="1F2937"/>
+                </a:solidFill>
+                <a:latin typeface="Noto Looped Thai"/>
+              </a:rPr>
+              <a:t>• ยังไม่ได้ทดลองกับผู้ใช้จริงและเก็บแบบประเมิน</a:t>
+            </a:r>
+          </a:p>
+          <a:p>
+            <a:pPr algn="l">
+              <a:lnSpc>
+                <a:spcPct val="125000"/>
+              </a:lnSpc>
+              <a:spcAft>
+                <a:spcPts val="300"/>
+              </a:spcAft>
+            </a:pPr>
+            <a:r>
+              <a:rPr sz="1080" b="0">
+                <a:solidFill>
+                  <a:srgbClr val="1F2937"/>
+                </a:solidFill>
+                <a:latin typeface="Noto Looped Thai"/>
+              </a:rPr>
+              <a:t>• รหัสแอปยังเป็น com.example ต้องเปลี่ยนก่อนเผยแพร่</a:t>
+            </a:r>
+          </a:p>
+          <a:p>
+            <a:pPr algn="l">
+              <a:lnSpc>
+                <a:spcPct val="125000"/>
+              </a:lnSpc>
+              <a:spcAft>
+                <a:spcPts val="300"/>
+              </a:spcAft>
+            </a:pPr>
+            <a:r>
+              <a:rPr sz="1080" b="0">
+                <a:solidFill>
+                  <a:srgbClr val="1F2937"/>
+                </a:solidFill>
+                <a:latin typeface="Noto Looped Thai"/>
+              </a:rPr>
+              <a:t>• ยังไม่ได้เผยแพร่ขึ้น Play Store</a:t>
+            </a:r>
+          </a:p>
+          <a:p>
+            <a:pPr algn="l">
+              <a:lnSpc>
+                <a:spcPct val="125000"/>
+              </a:lnSpc>
+              <a:spcAft>
+                <a:spcPts val="300"/>
+              </a:spcAft>
+            </a:pPr>
+            <a:r>
+              <a:rPr sz="1080" b="0">
+                <a:solidFill>
+                  <a:srgbClr val="1F2937"/>
+                </a:solidFill>
+                <a:latin typeface="Noto Looped Thai"/>
+              </a:rPr>
+              <a:t>• เซิร์ฟเวอร์แผนฟรีถูกพักอัตโนมัติถ้าไม่มีใครใช้ 7 วัน</a:t>
+            </a:r>
+          </a:p>
+        </p:txBody>
+      </p:sp>
+      <p:sp>
+        <p:nvSpPr>
+          <p:cNvPr id="17" name="Rounded Rectangle 16"/>
+          <p:cNvSpPr/>
+          <p:nvPr/>
+        </p:nvSpPr>
+        <p:spPr>
+          <a:xfrm>
+            <a:off x="640080" y="4206240"/>
+            <a:ext cx="10927080" cy="1554480"/>
+          </a:xfrm>
+          <a:prstGeom prst="roundRect">
+            <a:avLst>
+              <a:gd name="adj" fmla="val 12000"/>
+            </a:avLst>
+          </a:prstGeom>
+          <a:solidFill>
+            <a:srgbClr val="FFF8E6"/>
+          </a:solidFill>
+          <a:ln w="9525">
+            <a:solidFill>
+              <a:srgbClr val="F3D38A"/>
+            </a:solidFill>
+          </a:ln>
+          <a:effectLst/>
+        </p:spPr>
+        <p:style>
+          <a:lnRef idx="1">
+            <a:schemeClr val="accent1"/>
+          </a:lnRef>
+          <a:fillRef idx="3">
+            <a:schemeClr val="accent1"/>
+          </a:fillRef>
+          <a:effectRef idx="2">
+            <a:schemeClr val="accent1"/>
+          </a:effectRef>
+          <a:fontRef idx="minor">
+            <a:schemeClr val="lt1"/>
+          </a:fontRef>
+        </p:style>
+        <p:txBody>
+          <a:bodyPr rtlCol="0" anchor="ctr"/>
+          <a:lstStyle/>
+          <a:p/>
+        </p:txBody>
+      </p:sp>
+      <p:sp>
+        <p:nvSpPr>
+          <p:cNvPr id="18" name="TextBox 17"/>
+          <p:cNvSpPr txBox="1"/>
+          <p:nvPr/>
+        </p:nvSpPr>
+        <p:spPr>
+          <a:xfrm>
+            <a:off x="896112" y="4471416"/>
+            <a:ext cx="1554480" cy="256032"/>
+          </a:xfrm>
+          <a:prstGeom prst="rect">
+            <a:avLst/>
+          </a:prstGeom>
+          <a:noFill/>
+        </p:spPr>
+        <p:txBody>
+          <a:bodyPr wrap="square" anchor="t" lIns="0" rIns="0" tIns="0" bIns="0">
+            <a:spAutoFit/>
+          </a:bodyPr>
+          <a:lstStyle/>
+          <a:p>
+            <a:pPr algn="l">
+              <a:lnSpc>
+                <a:spcPct val="115000"/>
+              </a:lnSpc>
+              <a:spcAft>
+                <a:spcPts val="400"/>
+              </a:spcAft>
+            </a:pPr>
+            <a:r>
+              <a:rPr sz="1500" b="1">
+                <a:solidFill>
+                  <a:srgbClr val="8A5B00"/>
+                </a:solidFill>
+                <a:latin typeface="Noto Looped Thai"/>
+              </a:rPr>
+              <a:t>ก่อนวันสอบ</a:t>
+            </a:r>
+          </a:p>
+        </p:txBody>
+      </p:sp>
+      <p:sp>
+        <p:nvSpPr>
+          <p:cNvPr id="19" name="TextBox 18"/>
+          <p:cNvSpPr txBox="1"/>
+          <p:nvPr/>
+        </p:nvSpPr>
+        <p:spPr>
+          <a:xfrm>
+            <a:off x="2331720" y="4361688"/>
+            <a:ext cx="8915400" cy="1234440"/>
+          </a:xfrm>
+          <a:prstGeom prst="rect">
+            <a:avLst/>
+          </a:prstGeom>
+          <a:noFill/>
+        </p:spPr>
+        <p:txBody>
+          <a:bodyPr wrap="square" anchor="t" lIns="0" rIns="0" tIns="0" bIns="0">
+            <a:spAutoFit/>
+          </a:bodyPr>
+          <a:lstStyle/>
+          <a:p>
+            <a:pPr algn="l">
+              <a:lnSpc>
+                <a:spcPct val="135000"/>
+              </a:lnSpc>
+              <a:spcAft>
+                <a:spcPts val="400"/>
+              </a:spcAft>
+            </a:pPr>
+            <a:r>
+              <a:rPr sz="1200" b="0">
+                <a:solidFill>
+                  <a:srgbClr val="1F2937"/>
+                </a:solidFill>
+                <a:latin typeface="Noto Looped Thai"/>
+              </a:rPr>
+              <a:t>1) รันไฟล์ SQL ใน supabase/ ให้ครบ (update_05 และ update_06) แล้วลองสมัคร–ติ๊ก–ดูอันดับหนึ่งรอบ</a:t>
+            </a:r>
+          </a:p>
+          <a:p>
+            <a:pPr algn="l">
+              <a:lnSpc>
+                <a:spcPct val="135000"/>
+              </a:lnSpc>
+              <a:spcAft>
+                <a:spcPts val="400"/>
+              </a:spcAft>
+            </a:pPr>
+            <a:r>
+              <a:rPr sz="1200" b="0">
+                <a:solidFill>
+                  <a:srgbClr val="1F2937"/>
+                </a:solidFill>
+                <a:latin typeface="Noto Looped Thai"/>
+              </a:rPr>
+              <a:t>2) ติดตั้งไฟล์ APK ล่าสุดลงมือถือที่จะใช้สาธิต และเปิดใช้ครั้งหนึ่งก่อน</a:t>
+            </a:r>
+          </a:p>
+          <a:p>
+            <a:pPr algn="l">
+              <a:lnSpc>
+                <a:spcPct val="135000"/>
+              </a:lnSpc>
+              <a:spcAft>
+                <a:spcPts val="400"/>
+              </a:spcAft>
+            </a:pPr>
+            <a:r>
+              <a:rPr sz="1200" b="0">
+                <a:solidFill>
+                  <a:srgbClr val="1F2937"/>
+                </a:solidFill>
+                <a:latin typeface="Noto Looped Thai"/>
+              </a:rPr>
+              <a:t>3) เตรียมวิดีโอสาธิตสำรอง เผื่ออินเทอร์เน็ตหน้างานใช้ไม่ได้</a:t>
             </a:r>
           </a:p>
         </p:txBody>
@@ -10813,6 +10591,1470 @@
                 <a:latin typeface="Noto Looped Thai"/>
               </a:rPr>
               <a:t>16</a:t>
+            </a:r>
+          </a:p>
+        </p:txBody>
+      </p:sp>
+      <p:sp>
+        <p:nvSpPr>
+          <p:cNvPr id="4" name="TextBox 3"/>
+          <p:cNvSpPr txBox="1"/>
+          <p:nvPr/>
+        </p:nvSpPr>
+        <p:spPr>
+          <a:xfrm>
+            <a:off x="1188720" y="329184"/>
+            <a:ext cx="9875520" cy="384048"/>
+          </a:xfrm>
+          <a:prstGeom prst="rect">
+            <a:avLst/>
+          </a:prstGeom>
+          <a:noFill/>
+        </p:spPr>
+        <p:txBody>
+          <a:bodyPr wrap="square" anchor="t" lIns="0" rIns="0" tIns="0" bIns="0">
+            <a:spAutoFit/>
+          </a:bodyPr>
+          <a:lstStyle/>
+          <a:p>
+            <a:pPr algn="l">
+              <a:lnSpc>
+                <a:spcPct val="115000"/>
+              </a:lnSpc>
+              <a:spcAft>
+                <a:spcPts val="400"/>
+              </a:spcAft>
+            </a:pPr>
+            <a:r>
+              <a:rPr sz="2500" b="1">
+                <a:solidFill>
+                  <a:srgbClr val="0C2D48"/>
+                </a:solidFill>
+                <a:latin typeface="Noto Looped Thai"/>
+              </a:rPr>
+              <a:t>ผลส่งมอบของโครงงาน</a:t>
+            </a:r>
+          </a:p>
+        </p:txBody>
+      </p:sp>
+      <p:sp>
+        <p:nvSpPr>
+          <p:cNvPr id="5" name="TextBox 4"/>
+          <p:cNvSpPr txBox="1"/>
+          <p:nvPr/>
+        </p:nvSpPr>
+        <p:spPr>
+          <a:xfrm>
+            <a:off x="1188720" y="740664"/>
+            <a:ext cx="9784080" cy="292608"/>
+          </a:xfrm>
+          <a:prstGeom prst="rect">
+            <a:avLst/>
+          </a:prstGeom>
+          <a:noFill/>
+        </p:spPr>
+        <p:txBody>
+          <a:bodyPr wrap="square" anchor="t" lIns="0" rIns="0" tIns="0" bIns="0">
+            <a:spAutoFit/>
+          </a:bodyPr>
+          <a:lstStyle/>
+          <a:p>
+            <a:pPr algn="l">
+              <a:lnSpc>
+                <a:spcPct val="115000"/>
+              </a:lnSpc>
+              <a:spcAft>
+                <a:spcPts val="400"/>
+              </a:spcAft>
+            </a:pPr>
+            <a:r>
+              <a:rPr sz="1250" b="0">
+                <a:solidFill>
+                  <a:srgbClr val="64748B"/>
+                </a:solidFill>
+                <a:latin typeface="Noto Looped Thai"/>
+              </a:rPr>
+              <a:t>สิ่งที่กรรมการตรวจรับได้หลังการสอบ</a:t>
+            </a:r>
+          </a:p>
+        </p:txBody>
+      </p:sp>
+      <p:sp>
+        <p:nvSpPr>
+          <p:cNvPr id="6" name="Rounded Rectangle 5"/>
+          <p:cNvSpPr/>
+          <p:nvPr/>
+        </p:nvSpPr>
+        <p:spPr>
+          <a:xfrm>
+            <a:off x="8915400" y="384048"/>
+            <a:ext cx="2770632" cy="612648"/>
+          </a:xfrm>
+          <a:prstGeom prst="roundRect">
+            <a:avLst>
+              <a:gd name="adj" fmla="val 18000"/>
+            </a:avLst>
+          </a:prstGeom>
+          <a:solidFill>
+            <a:srgbClr val="E9F5F5"/>
+          </a:solidFill>
+          <a:ln w="9525">
+            <a:solidFill>
+              <a:srgbClr val="BFE0E0"/>
+            </a:solidFill>
+          </a:ln>
+          <a:effectLst/>
+        </p:spPr>
+        <p:style>
+          <a:lnRef idx="1">
+            <a:schemeClr val="accent1"/>
+          </a:lnRef>
+          <a:fillRef idx="3">
+            <a:schemeClr val="accent1"/>
+          </a:fillRef>
+          <a:effectRef idx="2">
+            <a:schemeClr val="accent1"/>
+          </a:effectRef>
+          <a:fontRef idx="minor">
+            <a:schemeClr val="lt1"/>
+          </a:fontRef>
+        </p:style>
+        <p:txBody>
+          <a:bodyPr rtlCol="0" anchor="ctr"/>
+          <a:lstStyle/>
+          <a:p/>
+        </p:txBody>
+      </p:sp>
+      <p:sp>
+        <p:nvSpPr>
+          <p:cNvPr id="7" name="TextBox 6"/>
+          <p:cNvSpPr txBox="1"/>
+          <p:nvPr/>
+        </p:nvSpPr>
+        <p:spPr>
+          <a:xfrm>
+            <a:off x="9098280" y="448056"/>
+            <a:ext cx="2423160" cy="182880"/>
+          </a:xfrm>
+          <a:prstGeom prst="rect">
+            <a:avLst/>
+          </a:prstGeom>
+          <a:noFill/>
+        </p:spPr>
+        <p:txBody>
+          <a:bodyPr wrap="square" anchor="t" lIns="0" rIns="0" tIns="0" bIns="0">
+            <a:spAutoFit/>
+          </a:bodyPr>
+          <a:lstStyle/>
+          <a:p>
+            <a:pPr algn="l">
+              <a:lnSpc>
+                <a:spcPct val="115000"/>
+              </a:lnSpc>
+              <a:spcAft>
+                <a:spcPts val="400"/>
+              </a:spcAft>
+            </a:pPr>
+            <a:r>
+              <a:rPr sz="1000" b="1">
+                <a:solidFill>
+                  <a:srgbClr val="2E8B8B"/>
+                </a:solidFill>
+                <a:latin typeface="Noto Looped Thai"/>
+              </a:rPr>
+              <a:t>ประเด็นสำคัญ</a:t>
+            </a:r>
+          </a:p>
+        </p:txBody>
+      </p:sp>
+      <p:sp>
+        <p:nvSpPr>
+          <p:cNvPr id="8" name="TextBox 7"/>
+          <p:cNvSpPr txBox="1"/>
+          <p:nvPr/>
+        </p:nvSpPr>
+        <p:spPr>
+          <a:xfrm>
+            <a:off x="9098280" y="640080"/>
+            <a:ext cx="2423160" cy="256032"/>
+          </a:xfrm>
+          <a:prstGeom prst="rect">
+            <a:avLst/>
+          </a:prstGeom>
+          <a:noFill/>
+        </p:spPr>
+        <p:txBody>
+          <a:bodyPr wrap="square" anchor="t" lIns="0" rIns="0" tIns="0" bIns="0">
+            <a:spAutoFit/>
+          </a:bodyPr>
+          <a:lstStyle/>
+          <a:p>
+            <a:pPr algn="l">
+              <a:lnSpc>
+                <a:spcPct val="115000"/>
+              </a:lnSpc>
+              <a:spcAft>
+                <a:spcPts val="400"/>
+              </a:spcAft>
+            </a:pPr>
+            <a:r>
+              <a:rPr sz="950" b="0">
+                <a:solidFill>
+                  <a:srgbClr val="1F2937"/>
+                </a:solidFill>
+                <a:latin typeface="Noto Looped Thai"/>
+              </a:rPr>
+              <a:t>ของจริง + เอกสาร + Source</a:t>
+            </a:r>
+          </a:p>
+        </p:txBody>
+      </p:sp>
+      <p:sp>
+        <p:nvSpPr>
+          <p:cNvPr id="9" name="Rounded Rectangle 8"/>
+          <p:cNvSpPr/>
+          <p:nvPr/>
+        </p:nvSpPr>
+        <p:spPr>
+          <a:xfrm>
+            <a:off x="777240" y="1298448"/>
+            <a:ext cx="475488" cy="475488"/>
+          </a:xfrm>
+          <a:prstGeom prst="roundRect">
+            <a:avLst>
+              <a:gd name="adj" fmla="val 20000"/>
+            </a:avLst>
+          </a:prstGeom>
+          <a:solidFill>
+            <a:srgbClr val="2F855A"/>
+          </a:solidFill>
+          <a:ln w="9525">
+            <a:solidFill>
+              <a:srgbClr val="2F855A"/>
+            </a:solidFill>
+          </a:ln>
+          <a:effectLst/>
+        </p:spPr>
+        <p:style>
+          <a:lnRef idx="1">
+            <a:schemeClr val="accent1"/>
+          </a:lnRef>
+          <a:fillRef idx="3">
+            <a:schemeClr val="accent1"/>
+          </a:fillRef>
+          <a:effectRef idx="2">
+            <a:schemeClr val="accent1"/>
+          </a:effectRef>
+          <a:fontRef idx="minor">
+            <a:schemeClr val="lt1"/>
+          </a:fontRef>
+        </p:style>
+        <p:txBody>
+          <a:bodyPr rtlCol="0" anchor="ctr"/>
+          <a:lstStyle/>
+          <a:p/>
+        </p:txBody>
+      </p:sp>
+      <p:sp>
+        <p:nvSpPr>
+          <p:cNvPr id="10" name="TextBox 9"/>
+          <p:cNvSpPr txBox="1"/>
+          <p:nvPr/>
+        </p:nvSpPr>
+        <p:spPr>
+          <a:xfrm>
+            <a:off x="777240" y="1399032"/>
+            <a:ext cx="475488" cy="274320"/>
+          </a:xfrm>
+          <a:prstGeom prst="rect">
+            <a:avLst/>
+          </a:prstGeom>
+          <a:noFill/>
+        </p:spPr>
+        <p:txBody>
+          <a:bodyPr wrap="square" anchor="t" lIns="0" rIns="0" tIns="0" bIns="0">
+            <a:spAutoFit/>
+          </a:bodyPr>
+          <a:lstStyle/>
+          <a:p>
+            <a:pPr algn="ctr">
+              <a:lnSpc>
+                <a:spcPct val="115000"/>
+              </a:lnSpc>
+              <a:spcAft>
+                <a:spcPts val="400"/>
+              </a:spcAft>
+            </a:pPr>
+            <a:r>
+              <a:rPr sz="1800" b="1">
+                <a:solidFill>
+                  <a:srgbClr val="FFFFFF"/>
+                </a:solidFill>
+                <a:latin typeface="Arial"/>
+              </a:rPr>
+              <a:t>✓</a:t>
+            </a:r>
+          </a:p>
+        </p:txBody>
+      </p:sp>
+      <p:sp>
+        <p:nvSpPr>
+          <p:cNvPr id="11" name="TextBox 10"/>
+          <p:cNvSpPr txBox="1"/>
+          <p:nvPr/>
+        </p:nvSpPr>
+        <p:spPr>
+          <a:xfrm>
+            <a:off x="1481328" y="1335024"/>
+            <a:ext cx="2468880" cy="256032"/>
+          </a:xfrm>
+          <a:prstGeom prst="rect">
+            <a:avLst/>
+          </a:prstGeom>
+          <a:noFill/>
+        </p:spPr>
+        <p:txBody>
+          <a:bodyPr wrap="square" anchor="t" lIns="0" rIns="0" tIns="0" bIns="0">
+            <a:spAutoFit/>
+          </a:bodyPr>
+          <a:lstStyle/>
+          <a:p>
+            <a:pPr algn="l">
+              <a:lnSpc>
+                <a:spcPct val="115000"/>
+              </a:lnSpc>
+              <a:spcAft>
+                <a:spcPts val="400"/>
+              </a:spcAft>
+            </a:pPr>
+            <a:r>
+              <a:rPr sz="1350" b="1">
+                <a:solidFill>
+                  <a:srgbClr val="0C2D48"/>
+                </a:solidFill>
+                <a:latin typeface="Noto Looped Thai"/>
+              </a:rPr>
+              <a:t>แอปที่ติดตั้งได้จริง</a:t>
+            </a:r>
+          </a:p>
+        </p:txBody>
+      </p:sp>
+      <p:sp>
+        <p:nvSpPr>
+          <p:cNvPr id="12" name="TextBox 11"/>
+          <p:cNvSpPr txBox="1"/>
+          <p:nvPr/>
+        </p:nvSpPr>
+        <p:spPr>
+          <a:xfrm>
+            <a:off x="4023360" y="1316736"/>
+            <a:ext cx="3749039" cy="548640"/>
+          </a:xfrm>
+          <a:prstGeom prst="rect">
+            <a:avLst/>
+          </a:prstGeom>
+          <a:noFill/>
+        </p:spPr>
+        <p:txBody>
+          <a:bodyPr wrap="square" anchor="t" lIns="0" rIns="0" tIns="0" bIns="0">
+            <a:spAutoFit/>
+          </a:bodyPr>
+          <a:lstStyle/>
+          <a:p>
+            <a:pPr algn="l">
+              <a:lnSpc>
+                <a:spcPct val="125000"/>
+              </a:lnSpc>
+              <a:spcAft>
+                <a:spcPts val="400"/>
+              </a:spcAft>
+            </a:pPr>
+            <a:r>
+              <a:rPr sz="1100" b="0">
+                <a:solidFill>
+                  <a:srgbClr val="1F2937"/>
+                </a:solidFill>
+                <a:latin typeface="Noto Looped Thai"/>
+              </a:rPr>
+              <a:t>app-release.apk ขนาด 64.0 MB · ติดตั้งบนมือถือ Android</a:t>
+            </a:r>
+          </a:p>
+        </p:txBody>
+      </p:sp>
+      <p:sp>
+        <p:nvSpPr>
+          <p:cNvPr id="13" name="Rounded Rectangle 12"/>
+          <p:cNvSpPr/>
+          <p:nvPr/>
+        </p:nvSpPr>
+        <p:spPr>
+          <a:xfrm>
+            <a:off x="777240" y="2029967"/>
+            <a:ext cx="475488" cy="475488"/>
+          </a:xfrm>
+          <a:prstGeom prst="roundRect">
+            <a:avLst>
+              <a:gd name="adj" fmla="val 20000"/>
+            </a:avLst>
+          </a:prstGeom>
+          <a:solidFill>
+            <a:srgbClr val="2F855A"/>
+          </a:solidFill>
+          <a:ln w="9525">
+            <a:solidFill>
+              <a:srgbClr val="2F855A"/>
+            </a:solidFill>
+          </a:ln>
+          <a:effectLst/>
+        </p:spPr>
+        <p:style>
+          <a:lnRef idx="1">
+            <a:schemeClr val="accent1"/>
+          </a:lnRef>
+          <a:fillRef idx="3">
+            <a:schemeClr val="accent1"/>
+          </a:fillRef>
+          <a:effectRef idx="2">
+            <a:schemeClr val="accent1"/>
+          </a:effectRef>
+          <a:fontRef idx="minor">
+            <a:schemeClr val="lt1"/>
+          </a:fontRef>
+        </p:style>
+        <p:txBody>
+          <a:bodyPr rtlCol="0" anchor="ctr"/>
+          <a:lstStyle/>
+          <a:p/>
+        </p:txBody>
+      </p:sp>
+      <p:sp>
+        <p:nvSpPr>
+          <p:cNvPr id="14" name="TextBox 13"/>
+          <p:cNvSpPr txBox="1"/>
+          <p:nvPr/>
+        </p:nvSpPr>
+        <p:spPr>
+          <a:xfrm>
+            <a:off x="777240" y="2130551"/>
+            <a:ext cx="475488" cy="274320"/>
+          </a:xfrm>
+          <a:prstGeom prst="rect">
+            <a:avLst/>
+          </a:prstGeom>
+          <a:noFill/>
+        </p:spPr>
+        <p:txBody>
+          <a:bodyPr wrap="square" anchor="t" lIns="0" rIns="0" tIns="0" bIns="0">
+            <a:spAutoFit/>
+          </a:bodyPr>
+          <a:lstStyle/>
+          <a:p>
+            <a:pPr algn="ctr">
+              <a:lnSpc>
+                <a:spcPct val="115000"/>
+              </a:lnSpc>
+              <a:spcAft>
+                <a:spcPts val="400"/>
+              </a:spcAft>
+            </a:pPr>
+            <a:r>
+              <a:rPr sz="1800" b="1">
+                <a:solidFill>
+                  <a:srgbClr val="FFFFFF"/>
+                </a:solidFill>
+                <a:latin typeface="Arial"/>
+              </a:rPr>
+              <a:t>✓</a:t>
+            </a:r>
+          </a:p>
+        </p:txBody>
+      </p:sp>
+      <p:sp>
+        <p:nvSpPr>
+          <p:cNvPr id="15" name="TextBox 14"/>
+          <p:cNvSpPr txBox="1"/>
+          <p:nvPr/>
+        </p:nvSpPr>
+        <p:spPr>
+          <a:xfrm>
+            <a:off x="1481328" y="2066543"/>
+            <a:ext cx="2468880" cy="256032"/>
+          </a:xfrm>
+          <a:prstGeom prst="rect">
+            <a:avLst/>
+          </a:prstGeom>
+          <a:noFill/>
+        </p:spPr>
+        <p:txBody>
+          <a:bodyPr wrap="square" anchor="t" lIns="0" rIns="0" tIns="0" bIns="0">
+            <a:spAutoFit/>
+          </a:bodyPr>
+          <a:lstStyle/>
+          <a:p>
+            <a:pPr algn="l">
+              <a:lnSpc>
+                <a:spcPct val="115000"/>
+              </a:lnSpc>
+              <a:spcAft>
+                <a:spcPts val="400"/>
+              </a:spcAft>
+            </a:pPr>
+            <a:r>
+              <a:rPr sz="1350" b="1">
+                <a:solidFill>
+                  <a:srgbClr val="0C2D48"/>
+                </a:solidFill>
+                <a:latin typeface="Noto Looped Thai"/>
+              </a:rPr>
+              <a:t>Source Code</a:t>
+            </a:r>
+          </a:p>
+        </p:txBody>
+      </p:sp>
+      <p:sp>
+        <p:nvSpPr>
+          <p:cNvPr id="16" name="TextBox 15"/>
+          <p:cNvSpPr txBox="1"/>
+          <p:nvPr/>
+        </p:nvSpPr>
+        <p:spPr>
+          <a:xfrm>
+            <a:off x="4023360" y="2048255"/>
+            <a:ext cx="3749039" cy="548640"/>
+          </a:xfrm>
+          <a:prstGeom prst="rect">
+            <a:avLst/>
+          </a:prstGeom>
+          <a:noFill/>
+        </p:spPr>
+        <p:txBody>
+          <a:bodyPr wrap="square" anchor="t" lIns="0" rIns="0" tIns="0" bIns="0">
+            <a:spAutoFit/>
+          </a:bodyPr>
+          <a:lstStyle/>
+          <a:p>
+            <a:pPr algn="l">
+              <a:lnSpc>
+                <a:spcPct val="125000"/>
+              </a:lnSpc>
+              <a:spcAft>
+                <a:spcPts val="400"/>
+              </a:spcAft>
+            </a:pPr>
+            <a:r>
+              <a:rPr sz="1100" b="0">
+                <a:solidFill>
+                  <a:srgbClr val="1F2937"/>
+                </a:solidFill>
+                <a:latin typeface="Noto Looped Thai"/>
+              </a:rPr>
+              <a:t>Git 32 commit · โค้ดที่เขียนเอง 60 ไฟล์ Dart รวม 8,804 บรรทัด</a:t>
+            </a:r>
+          </a:p>
+        </p:txBody>
+      </p:sp>
+      <p:sp>
+        <p:nvSpPr>
+          <p:cNvPr id="17" name="Rounded Rectangle 16"/>
+          <p:cNvSpPr/>
+          <p:nvPr/>
+        </p:nvSpPr>
+        <p:spPr>
+          <a:xfrm>
+            <a:off x="777240" y="2761488"/>
+            <a:ext cx="475488" cy="475488"/>
+          </a:xfrm>
+          <a:prstGeom prst="roundRect">
+            <a:avLst>
+              <a:gd name="adj" fmla="val 20000"/>
+            </a:avLst>
+          </a:prstGeom>
+          <a:solidFill>
+            <a:srgbClr val="2F855A"/>
+          </a:solidFill>
+          <a:ln w="9525">
+            <a:solidFill>
+              <a:srgbClr val="2F855A"/>
+            </a:solidFill>
+          </a:ln>
+          <a:effectLst/>
+        </p:spPr>
+        <p:style>
+          <a:lnRef idx="1">
+            <a:schemeClr val="accent1"/>
+          </a:lnRef>
+          <a:fillRef idx="3">
+            <a:schemeClr val="accent1"/>
+          </a:fillRef>
+          <a:effectRef idx="2">
+            <a:schemeClr val="accent1"/>
+          </a:effectRef>
+          <a:fontRef idx="minor">
+            <a:schemeClr val="lt1"/>
+          </a:fontRef>
+        </p:style>
+        <p:txBody>
+          <a:bodyPr rtlCol="0" anchor="ctr"/>
+          <a:lstStyle/>
+          <a:p/>
+        </p:txBody>
+      </p:sp>
+      <p:sp>
+        <p:nvSpPr>
+          <p:cNvPr id="18" name="TextBox 17"/>
+          <p:cNvSpPr txBox="1"/>
+          <p:nvPr/>
+        </p:nvSpPr>
+        <p:spPr>
+          <a:xfrm>
+            <a:off x="777240" y="2862072"/>
+            <a:ext cx="475488" cy="274320"/>
+          </a:xfrm>
+          <a:prstGeom prst="rect">
+            <a:avLst/>
+          </a:prstGeom>
+          <a:noFill/>
+        </p:spPr>
+        <p:txBody>
+          <a:bodyPr wrap="square" anchor="t" lIns="0" rIns="0" tIns="0" bIns="0">
+            <a:spAutoFit/>
+          </a:bodyPr>
+          <a:lstStyle/>
+          <a:p>
+            <a:pPr algn="ctr">
+              <a:lnSpc>
+                <a:spcPct val="115000"/>
+              </a:lnSpc>
+              <a:spcAft>
+                <a:spcPts val="400"/>
+              </a:spcAft>
+            </a:pPr>
+            <a:r>
+              <a:rPr sz="1800" b="1">
+                <a:solidFill>
+                  <a:srgbClr val="FFFFFF"/>
+                </a:solidFill>
+                <a:latin typeface="Arial"/>
+              </a:rPr>
+              <a:t>✓</a:t>
+            </a:r>
+          </a:p>
+        </p:txBody>
+      </p:sp>
+      <p:sp>
+        <p:nvSpPr>
+          <p:cNvPr id="19" name="TextBox 18"/>
+          <p:cNvSpPr txBox="1"/>
+          <p:nvPr/>
+        </p:nvSpPr>
+        <p:spPr>
+          <a:xfrm>
+            <a:off x="1481328" y="2798064"/>
+            <a:ext cx="2468880" cy="256032"/>
+          </a:xfrm>
+          <a:prstGeom prst="rect">
+            <a:avLst/>
+          </a:prstGeom>
+          <a:noFill/>
+        </p:spPr>
+        <p:txBody>
+          <a:bodyPr wrap="square" anchor="t" lIns="0" rIns="0" tIns="0" bIns="0">
+            <a:spAutoFit/>
+          </a:bodyPr>
+          <a:lstStyle/>
+          <a:p>
+            <a:pPr algn="l">
+              <a:lnSpc>
+                <a:spcPct val="115000"/>
+              </a:lnSpc>
+              <a:spcAft>
+                <a:spcPts val="400"/>
+              </a:spcAft>
+            </a:pPr>
+            <a:r>
+              <a:rPr sz="1350" b="1">
+                <a:solidFill>
+                  <a:srgbClr val="0C2D48"/>
+                </a:solidFill>
+                <a:latin typeface="Noto Looped Thai"/>
+              </a:rPr>
+              <a:t>ฐานข้อมูล / โครงสร้าง</a:t>
+            </a:r>
+          </a:p>
+        </p:txBody>
+      </p:sp>
+      <p:sp>
+        <p:nvSpPr>
+          <p:cNvPr id="20" name="TextBox 19"/>
+          <p:cNvSpPr txBox="1"/>
+          <p:nvPr/>
+        </p:nvSpPr>
+        <p:spPr>
+          <a:xfrm>
+            <a:off x="4023360" y="2779776"/>
+            <a:ext cx="3749039" cy="548640"/>
+          </a:xfrm>
+          <a:prstGeom prst="rect">
+            <a:avLst/>
+          </a:prstGeom>
+          <a:noFill/>
+        </p:spPr>
+        <p:txBody>
+          <a:bodyPr wrap="square" anchor="t" lIns="0" rIns="0" tIns="0" bIns="0">
+            <a:spAutoFit/>
+          </a:bodyPr>
+          <a:lstStyle/>
+          <a:p>
+            <a:pPr algn="l">
+              <a:lnSpc>
+                <a:spcPct val="125000"/>
+              </a:lnSpc>
+              <a:spcAft>
+                <a:spcPts val="400"/>
+              </a:spcAft>
+            </a:pPr>
+            <a:r>
+              <a:rPr sz="1100" b="0">
+                <a:solidFill>
+                  <a:srgbClr val="1F2937"/>
+                </a:solidFill>
+                <a:latin typeface="Noto Looped Thai"/>
+              </a:rPr>
+              <a:t>SQLite ในเครื่อง 3 ตาราง · คลาวด์ 5 ตาราง + 15 ฟังก์ชัน</a:t>
+            </a:r>
+          </a:p>
+        </p:txBody>
+      </p:sp>
+      <p:sp>
+        <p:nvSpPr>
+          <p:cNvPr id="21" name="Rounded Rectangle 20"/>
+          <p:cNvSpPr/>
+          <p:nvPr/>
+        </p:nvSpPr>
+        <p:spPr>
+          <a:xfrm>
+            <a:off x="777240" y="3493008"/>
+            <a:ext cx="475488" cy="475488"/>
+          </a:xfrm>
+          <a:prstGeom prst="roundRect">
+            <a:avLst>
+              <a:gd name="adj" fmla="val 20000"/>
+            </a:avLst>
+          </a:prstGeom>
+          <a:solidFill>
+            <a:srgbClr val="2F855A"/>
+          </a:solidFill>
+          <a:ln w="9525">
+            <a:solidFill>
+              <a:srgbClr val="2F855A"/>
+            </a:solidFill>
+          </a:ln>
+          <a:effectLst/>
+        </p:spPr>
+        <p:style>
+          <a:lnRef idx="1">
+            <a:schemeClr val="accent1"/>
+          </a:lnRef>
+          <a:fillRef idx="3">
+            <a:schemeClr val="accent1"/>
+          </a:fillRef>
+          <a:effectRef idx="2">
+            <a:schemeClr val="accent1"/>
+          </a:effectRef>
+          <a:fontRef idx="minor">
+            <a:schemeClr val="lt1"/>
+          </a:fontRef>
+        </p:style>
+        <p:txBody>
+          <a:bodyPr rtlCol="0" anchor="ctr"/>
+          <a:lstStyle/>
+          <a:p/>
+        </p:txBody>
+      </p:sp>
+      <p:sp>
+        <p:nvSpPr>
+          <p:cNvPr id="22" name="TextBox 21"/>
+          <p:cNvSpPr txBox="1"/>
+          <p:nvPr/>
+        </p:nvSpPr>
+        <p:spPr>
+          <a:xfrm>
+            <a:off x="777240" y="3593592"/>
+            <a:ext cx="475488" cy="274320"/>
+          </a:xfrm>
+          <a:prstGeom prst="rect">
+            <a:avLst/>
+          </a:prstGeom>
+          <a:noFill/>
+        </p:spPr>
+        <p:txBody>
+          <a:bodyPr wrap="square" anchor="t" lIns="0" rIns="0" tIns="0" bIns="0">
+            <a:spAutoFit/>
+          </a:bodyPr>
+          <a:lstStyle/>
+          <a:p>
+            <a:pPr algn="ctr">
+              <a:lnSpc>
+                <a:spcPct val="115000"/>
+              </a:lnSpc>
+              <a:spcAft>
+                <a:spcPts val="400"/>
+              </a:spcAft>
+            </a:pPr>
+            <a:r>
+              <a:rPr sz="1800" b="1">
+                <a:solidFill>
+                  <a:srgbClr val="FFFFFF"/>
+                </a:solidFill>
+                <a:latin typeface="Arial"/>
+              </a:rPr>
+              <a:t>✓</a:t>
+            </a:r>
+          </a:p>
+        </p:txBody>
+      </p:sp>
+      <p:sp>
+        <p:nvSpPr>
+          <p:cNvPr id="23" name="TextBox 22"/>
+          <p:cNvSpPr txBox="1"/>
+          <p:nvPr/>
+        </p:nvSpPr>
+        <p:spPr>
+          <a:xfrm>
+            <a:off x="1481328" y="3529584"/>
+            <a:ext cx="2468880" cy="256032"/>
+          </a:xfrm>
+          <a:prstGeom prst="rect">
+            <a:avLst/>
+          </a:prstGeom>
+          <a:noFill/>
+        </p:spPr>
+        <p:txBody>
+          <a:bodyPr wrap="square" anchor="t" lIns="0" rIns="0" tIns="0" bIns="0">
+            <a:spAutoFit/>
+          </a:bodyPr>
+          <a:lstStyle/>
+          <a:p>
+            <a:pPr algn="l">
+              <a:lnSpc>
+                <a:spcPct val="115000"/>
+              </a:lnSpc>
+              <a:spcAft>
+                <a:spcPts val="400"/>
+              </a:spcAft>
+            </a:pPr>
+            <a:r>
+              <a:rPr sz="1350" b="1">
+                <a:solidFill>
+                  <a:srgbClr val="0C2D48"/>
+                </a:solidFill>
+                <a:latin typeface="Noto Looped Thai"/>
+              </a:rPr>
+              <a:t>สคริปต์ติดตั้งเซิร์ฟเวอร์</a:t>
+            </a:r>
+          </a:p>
+        </p:txBody>
+      </p:sp>
+      <p:sp>
+        <p:nvSpPr>
+          <p:cNvPr id="24" name="TextBox 23"/>
+          <p:cNvSpPr txBox="1"/>
+          <p:nvPr/>
+        </p:nvSpPr>
+        <p:spPr>
+          <a:xfrm>
+            <a:off x="4023360" y="3511296"/>
+            <a:ext cx="3749039" cy="548640"/>
+          </a:xfrm>
+          <a:prstGeom prst="rect">
+            <a:avLst/>
+          </a:prstGeom>
+          <a:noFill/>
+        </p:spPr>
+        <p:txBody>
+          <a:bodyPr wrap="square" anchor="t" lIns="0" rIns="0" tIns="0" bIns="0">
+            <a:spAutoFit/>
+          </a:bodyPr>
+          <a:lstStyle/>
+          <a:p>
+            <a:pPr algn="l">
+              <a:lnSpc>
+                <a:spcPct val="125000"/>
+              </a:lnSpc>
+              <a:spcAft>
+                <a:spcPts val="400"/>
+              </a:spcAft>
+            </a:pPr>
+            <a:r>
+              <a:rPr sz="1100" b="0">
+                <a:solidFill>
+                  <a:srgbClr val="1F2937"/>
+                </a:solidFill>
+                <a:latin typeface="Noto Looped Thai"/>
+              </a:rPr>
+              <a:t>ไฟล์ SQL ในโฟลเดอร์ supabase/ รันซ้ำได้ไม่ทำข้อมูลเสีย</a:t>
+            </a:r>
+          </a:p>
+        </p:txBody>
+      </p:sp>
+      <p:sp>
+        <p:nvSpPr>
+          <p:cNvPr id="25" name="Rounded Rectangle 24"/>
+          <p:cNvSpPr/>
+          <p:nvPr/>
+        </p:nvSpPr>
+        <p:spPr>
+          <a:xfrm>
+            <a:off x="777240" y="4224528"/>
+            <a:ext cx="475488" cy="475488"/>
+          </a:xfrm>
+          <a:prstGeom prst="roundRect">
+            <a:avLst>
+              <a:gd name="adj" fmla="val 20000"/>
+            </a:avLst>
+          </a:prstGeom>
+          <a:solidFill>
+            <a:srgbClr val="2F855A"/>
+          </a:solidFill>
+          <a:ln w="9525">
+            <a:solidFill>
+              <a:srgbClr val="2F855A"/>
+            </a:solidFill>
+          </a:ln>
+          <a:effectLst/>
+        </p:spPr>
+        <p:style>
+          <a:lnRef idx="1">
+            <a:schemeClr val="accent1"/>
+          </a:lnRef>
+          <a:fillRef idx="3">
+            <a:schemeClr val="accent1"/>
+          </a:fillRef>
+          <a:effectRef idx="2">
+            <a:schemeClr val="accent1"/>
+          </a:effectRef>
+          <a:fontRef idx="minor">
+            <a:schemeClr val="lt1"/>
+          </a:fontRef>
+        </p:style>
+        <p:txBody>
+          <a:bodyPr rtlCol="0" anchor="ctr"/>
+          <a:lstStyle/>
+          <a:p/>
+        </p:txBody>
+      </p:sp>
+      <p:sp>
+        <p:nvSpPr>
+          <p:cNvPr id="26" name="TextBox 25"/>
+          <p:cNvSpPr txBox="1"/>
+          <p:nvPr/>
+        </p:nvSpPr>
+        <p:spPr>
+          <a:xfrm>
+            <a:off x="777240" y="4325112"/>
+            <a:ext cx="475488" cy="274320"/>
+          </a:xfrm>
+          <a:prstGeom prst="rect">
+            <a:avLst/>
+          </a:prstGeom>
+          <a:noFill/>
+        </p:spPr>
+        <p:txBody>
+          <a:bodyPr wrap="square" anchor="t" lIns="0" rIns="0" tIns="0" bIns="0">
+            <a:spAutoFit/>
+          </a:bodyPr>
+          <a:lstStyle/>
+          <a:p>
+            <a:pPr algn="ctr">
+              <a:lnSpc>
+                <a:spcPct val="115000"/>
+              </a:lnSpc>
+              <a:spcAft>
+                <a:spcPts val="400"/>
+              </a:spcAft>
+            </a:pPr>
+            <a:r>
+              <a:rPr sz="1800" b="1">
+                <a:solidFill>
+                  <a:srgbClr val="FFFFFF"/>
+                </a:solidFill>
+                <a:latin typeface="Arial"/>
+              </a:rPr>
+              <a:t>✓</a:t>
+            </a:r>
+          </a:p>
+        </p:txBody>
+      </p:sp>
+      <p:sp>
+        <p:nvSpPr>
+          <p:cNvPr id="27" name="TextBox 26"/>
+          <p:cNvSpPr txBox="1"/>
+          <p:nvPr/>
+        </p:nvSpPr>
+        <p:spPr>
+          <a:xfrm>
+            <a:off x="1481328" y="4261104"/>
+            <a:ext cx="2468880" cy="256032"/>
+          </a:xfrm>
+          <a:prstGeom prst="rect">
+            <a:avLst/>
+          </a:prstGeom>
+          <a:noFill/>
+        </p:spPr>
+        <p:txBody>
+          <a:bodyPr wrap="square" anchor="t" lIns="0" rIns="0" tIns="0" bIns="0">
+            <a:spAutoFit/>
+          </a:bodyPr>
+          <a:lstStyle/>
+          <a:p>
+            <a:pPr algn="l">
+              <a:lnSpc>
+                <a:spcPct val="115000"/>
+              </a:lnSpc>
+              <a:spcAft>
+                <a:spcPts val="400"/>
+              </a:spcAft>
+            </a:pPr>
+            <a:r>
+              <a:rPr sz="1350" b="1">
+                <a:solidFill>
+                  <a:srgbClr val="0C2D48"/>
+                </a:solidFill>
+                <a:latin typeface="Noto Looped Thai"/>
+              </a:rPr>
+              <a:t>เอกสารโครงงาน</a:t>
+            </a:r>
+          </a:p>
+        </p:txBody>
+      </p:sp>
+      <p:sp>
+        <p:nvSpPr>
+          <p:cNvPr id="28" name="TextBox 27"/>
+          <p:cNvSpPr txBox="1"/>
+          <p:nvPr/>
+        </p:nvSpPr>
+        <p:spPr>
+          <a:xfrm>
+            <a:off x="4023360" y="4242816"/>
+            <a:ext cx="3749039" cy="548640"/>
+          </a:xfrm>
+          <a:prstGeom prst="rect">
+            <a:avLst/>
+          </a:prstGeom>
+          <a:noFill/>
+        </p:spPr>
+        <p:txBody>
+          <a:bodyPr wrap="square" anchor="t" lIns="0" rIns="0" tIns="0" bIns="0">
+            <a:spAutoFit/>
+          </a:bodyPr>
+          <a:lstStyle/>
+          <a:p>
+            <a:pPr algn="l">
+              <a:lnSpc>
+                <a:spcPct val="125000"/>
+              </a:lnSpc>
+              <a:spcAft>
+                <a:spcPts val="400"/>
+              </a:spcAft>
+            </a:pPr>
+            <a:r>
+              <a:rPr sz="1100" b="0">
+                <a:solidFill>
+                  <a:srgbClr val="1F2937"/>
+                </a:solidFill>
+                <a:latin typeface="Noto Looped Thai"/>
+              </a:rPr>
+              <a:t>คู่มือติดตั้ง SETUP.md · README · เอกสารนำเสนอชุดนี้</a:t>
+            </a:r>
+          </a:p>
+        </p:txBody>
+      </p:sp>
+      <p:sp>
+        <p:nvSpPr>
+          <p:cNvPr id="29" name="Rounded Rectangle 28"/>
+          <p:cNvSpPr/>
+          <p:nvPr/>
+        </p:nvSpPr>
+        <p:spPr>
+          <a:xfrm>
+            <a:off x="777240" y="4956048"/>
+            <a:ext cx="475488" cy="475488"/>
+          </a:xfrm>
+          <a:prstGeom prst="roundRect">
+            <a:avLst>
+              <a:gd name="adj" fmla="val 20000"/>
+            </a:avLst>
+          </a:prstGeom>
+          <a:solidFill>
+            <a:srgbClr val="2F855A"/>
+          </a:solidFill>
+          <a:ln w="9525">
+            <a:solidFill>
+              <a:srgbClr val="2F855A"/>
+            </a:solidFill>
+          </a:ln>
+          <a:effectLst/>
+        </p:spPr>
+        <p:style>
+          <a:lnRef idx="1">
+            <a:schemeClr val="accent1"/>
+          </a:lnRef>
+          <a:fillRef idx="3">
+            <a:schemeClr val="accent1"/>
+          </a:fillRef>
+          <a:effectRef idx="2">
+            <a:schemeClr val="accent1"/>
+          </a:effectRef>
+          <a:fontRef idx="minor">
+            <a:schemeClr val="lt1"/>
+          </a:fontRef>
+        </p:style>
+        <p:txBody>
+          <a:bodyPr rtlCol="0" anchor="ctr"/>
+          <a:lstStyle/>
+          <a:p/>
+        </p:txBody>
+      </p:sp>
+      <p:sp>
+        <p:nvSpPr>
+          <p:cNvPr id="30" name="TextBox 29"/>
+          <p:cNvSpPr txBox="1"/>
+          <p:nvPr/>
+        </p:nvSpPr>
+        <p:spPr>
+          <a:xfrm>
+            <a:off x="777240" y="5056632"/>
+            <a:ext cx="475488" cy="274320"/>
+          </a:xfrm>
+          <a:prstGeom prst="rect">
+            <a:avLst/>
+          </a:prstGeom>
+          <a:noFill/>
+        </p:spPr>
+        <p:txBody>
+          <a:bodyPr wrap="square" anchor="t" lIns="0" rIns="0" tIns="0" bIns="0">
+            <a:spAutoFit/>
+          </a:bodyPr>
+          <a:lstStyle/>
+          <a:p>
+            <a:pPr algn="ctr">
+              <a:lnSpc>
+                <a:spcPct val="115000"/>
+              </a:lnSpc>
+              <a:spcAft>
+                <a:spcPts val="400"/>
+              </a:spcAft>
+            </a:pPr>
+            <a:r>
+              <a:rPr sz="1800" b="1">
+                <a:solidFill>
+                  <a:srgbClr val="FFFFFF"/>
+                </a:solidFill>
+                <a:latin typeface="Arial"/>
+              </a:rPr>
+              <a:t>✓</a:t>
+            </a:r>
+          </a:p>
+        </p:txBody>
+      </p:sp>
+      <p:sp>
+        <p:nvSpPr>
+          <p:cNvPr id="31" name="TextBox 30"/>
+          <p:cNvSpPr txBox="1"/>
+          <p:nvPr/>
+        </p:nvSpPr>
+        <p:spPr>
+          <a:xfrm>
+            <a:off x="1481328" y="4992624"/>
+            <a:ext cx="2468880" cy="256032"/>
+          </a:xfrm>
+          <a:prstGeom prst="rect">
+            <a:avLst/>
+          </a:prstGeom>
+          <a:noFill/>
+        </p:spPr>
+        <p:txBody>
+          <a:bodyPr wrap="square" anchor="t" lIns="0" rIns="0" tIns="0" bIns="0">
+            <a:spAutoFit/>
+          </a:bodyPr>
+          <a:lstStyle/>
+          <a:p>
+            <a:pPr algn="l">
+              <a:lnSpc>
+                <a:spcPct val="115000"/>
+              </a:lnSpc>
+              <a:spcAft>
+                <a:spcPts val="400"/>
+              </a:spcAft>
+            </a:pPr>
+            <a:r>
+              <a:rPr sz="1350" b="1">
+                <a:solidFill>
+                  <a:srgbClr val="0C2D48"/>
+                </a:solidFill>
+                <a:latin typeface="Noto Looped Thai"/>
+              </a:rPr>
+              <a:t>หลักฐานทดสอบ</a:t>
+            </a:r>
+          </a:p>
+        </p:txBody>
+      </p:sp>
+      <p:sp>
+        <p:nvSpPr>
+          <p:cNvPr id="32" name="TextBox 31"/>
+          <p:cNvSpPr txBox="1"/>
+          <p:nvPr/>
+        </p:nvSpPr>
+        <p:spPr>
+          <a:xfrm>
+            <a:off x="4023360" y="4974336"/>
+            <a:ext cx="3749039" cy="548640"/>
+          </a:xfrm>
+          <a:prstGeom prst="rect">
+            <a:avLst/>
+          </a:prstGeom>
+          <a:noFill/>
+        </p:spPr>
+        <p:txBody>
+          <a:bodyPr wrap="square" anchor="t" lIns="0" rIns="0" tIns="0" bIns="0">
+            <a:spAutoFit/>
+          </a:bodyPr>
+          <a:lstStyle/>
+          <a:p>
+            <a:pPr algn="l">
+              <a:lnSpc>
+                <a:spcPct val="125000"/>
+              </a:lnSpc>
+              <a:spcAft>
+                <a:spcPts val="400"/>
+              </a:spcAft>
+            </a:pPr>
+            <a:r>
+              <a:rPr sz="1100" b="0">
+                <a:solidFill>
+                  <a:srgbClr val="1F2937"/>
+                </a:solidFill>
+                <a:latin typeface="Noto Looped Thai"/>
+              </a:rPr>
+              <a:t>ผล flutter test 120 กรณี · ภาพหน้าจอผลทดสอบทุกขั้น</a:t>
+            </a:r>
+          </a:p>
+        </p:txBody>
+      </p:sp>
+      <p:sp>
+        <p:nvSpPr>
+          <p:cNvPr id="33" name="Rounded Rectangle 32"/>
+          <p:cNvSpPr/>
+          <p:nvPr/>
+        </p:nvSpPr>
+        <p:spPr>
+          <a:xfrm>
+            <a:off x="7973568" y="1389888"/>
+            <a:ext cx="9074624" cy="3072384"/>
+          </a:xfrm>
+          <a:prstGeom prst="roundRect">
+            <a:avLst>
+              <a:gd name="adj" fmla="val 5000"/>
+            </a:avLst>
+          </a:prstGeom>
+          <a:solidFill>
+            <a:srgbClr val="FFFFFF"/>
+          </a:solidFill>
+          <a:ln w="9525">
+            <a:solidFill>
+              <a:srgbClr val="DDE3EA"/>
+            </a:solidFill>
+          </a:ln>
+          <a:effectLst/>
+        </p:spPr>
+        <p:style>
+          <a:lnRef idx="1">
+            <a:schemeClr val="accent1"/>
+          </a:lnRef>
+          <a:fillRef idx="3">
+            <a:schemeClr val="accent1"/>
+          </a:fillRef>
+          <a:effectRef idx="2">
+            <a:schemeClr val="accent1"/>
+          </a:effectRef>
+          <a:fontRef idx="minor">
+            <a:schemeClr val="lt1"/>
+          </a:fontRef>
+        </p:style>
+        <p:txBody>
+          <a:bodyPr rtlCol="0" anchor="ctr"/>
+          <a:lstStyle/>
+          <a:p/>
+        </p:txBody>
+      </p:sp>
+      <p:pic>
+        <p:nvPicPr>
+          <p:cNvPr id="34" name="Picture 33" descr="03_evidence_test.png"/>
+          <p:cNvPicPr>
+            <a:picLocks noChangeAspect="1"/>
+          </p:cNvPicPr>
+          <p:nvPr/>
+        </p:nvPicPr>
+        <p:blipFill>
+          <a:blip r:embed="rId2"/>
+          <a:stretch>
+            <a:fillRect/>
+          </a:stretch>
+        </p:blipFill>
+        <p:spPr>
+          <a:xfrm>
+            <a:off x="8001000" y="1417320"/>
+            <a:ext cx="9019760" cy="3017520"/>
+          </a:xfrm>
+          <a:prstGeom prst="rect">
+            <a:avLst/>
+          </a:prstGeom>
+        </p:spPr>
+      </p:pic>
+      <p:sp>
+        <p:nvSpPr>
+          <p:cNvPr id="35" name="TextBox 34"/>
+          <p:cNvSpPr txBox="1"/>
+          <p:nvPr/>
+        </p:nvSpPr>
+        <p:spPr>
+          <a:xfrm>
+            <a:off x="7955279" y="4617720"/>
+            <a:ext cx="3611880" cy="274320"/>
+          </a:xfrm>
+          <a:prstGeom prst="rect">
+            <a:avLst/>
+          </a:prstGeom>
+          <a:noFill/>
+        </p:spPr>
+        <p:txBody>
+          <a:bodyPr wrap="square" anchor="t" lIns="0" rIns="0" tIns="0" bIns="0">
+            <a:spAutoFit/>
+          </a:bodyPr>
+          <a:lstStyle/>
+          <a:p>
+            <a:pPr algn="ctr">
+              <a:lnSpc>
+                <a:spcPct val="115000"/>
+              </a:lnSpc>
+              <a:spcAft>
+                <a:spcPts val="400"/>
+              </a:spcAft>
+            </a:pPr>
+            <a:r>
+              <a:rPr sz="1100" b="1">
+                <a:solidFill>
+                  <a:srgbClr val="64748B"/>
+                </a:solidFill>
+                <a:latin typeface="Noto Looped Thai"/>
+              </a:rPr>
+              <a:t>ผลรัน flutter test จริง</a:t>
+            </a:r>
+          </a:p>
+        </p:txBody>
+      </p:sp>
+    </p:spTree>
+  </p:cSld>
+  <p:clrMapOvr>
+    <a:masterClrMapping/>
+  </p:clrMapOvr>
+</p:sld>
+</file>
+
+<file path=ppt/slides/slide18.xml><?xml version="1.0" encoding="utf-8"?>
+<p:sld xmlns:a="http://schemas.openxmlformats.org/drawingml/2006/main" xmlns:p="http://schemas.openxmlformats.org/presentationml/2006/main" xmlns:r="http://schemas.openxmlformats.org/officeDocument/2006/relationships">
+  <p:cSld>
+    <p:spTree>
+      <p:nvGrpSpPr>
+        <p:cNvPr id="1" name=""/>
+        <p:cNvGrpSpPr/>
+        <p:nvPr/>
+      </p:nvGrpSpPr>
+      <p:grpSpPr/>
+      <p:sp>
+        <p:nvSpPr>
+          <p:cNvPr id="2" name="Rounded Rectangle 1"/>
+          <p:cNvSpPr/>
+          <p:nvPr/>
+        </p:nvSpPr>
+        <p:spPr>
+          <a:xfrm>
+            <a:off x="502920" y="384048"/>
+            <a:ext cx="548640" cy="457200"/>
+          </a:xfrm>
+          <a:prstGeom prst="roundRect">
+            <a:avLst>
+              <a:gd name="adj" fmla="val 15000"/>
+            </a:avLst>
+          </a:prstGeom>
+          <a:solidFill>
+            <a:srgbClr val="0C2D48"/>
+          </a:solidFill>
+          <a:ln w="9525">
+            <a:solidFill>
+              <a:srgbClr val="0C2D48"/>
+            </a:solidFill>
+          </a:ln>
+          <a:effectLst/>
+        </p:spPr>
+        <p:style>
+          <a:lnRef idx="1">
+            <a:schemeClr val="accent1"/>
+          </a:lnRef>
+          <a:fillRef idx="3">
+            <a:schemeClr val="accent1"/>
+          </a:fillRef>
+          <a:effectRef idx="2">
+            <a:schemeClr val="accent1"/>
+          </a:effectRef>
+          <a:fontRef idx="minor">
+            <a:schemeClr val="lt1"/>
+          </a:fontRef>
+        </p:style>
+        <p:txBody>
+          <a:bodyPr rtlCol="0" anchor="ctr"/>
+          <a:lstStyle/>
+          <a:p/>
+        </p:txBody>
+      </p:sp>
+      <p:sp>
+        <p:nvSpPr>
+          <p:cNvPr id="3" name="TextBox 2"/>
+          <p:cNvSpPr txBox="1"/>
+          <p:nvPr/>
+        </p:nvSpPr>
+        <p:spPr>
+          <a:xfrm>
+            <a:off x="502920" y="448056"/>
+            <a:ext cx="548640" cy="219456"/>
+          </a:xfrm>
+          <a:prstGeom prst="rect">
+            <a:avLst/>
+          </a:prstGeom>
+          <a:noFill/>
+        </p:spPr>
+        <p:txBody>
+          <a:bodyPr wrap="square" anchor="t" lIns="0" rIns="0" tIns="0" bIns="0">
+            <a:spAutoFit/>
+          </a:bodyPr>
+          <a:lstStyle/>
+          <a:p>
+            <a:pPr algn="ctr">
+              <a:lnSpc>
+                <a:spcPct val="115000"/>
+              </a:lnSpc>
+              <a:spcAft>
+                <a:spcPts val="400"/>
+              </a:spcAft>
+            </a:pPr>
+            <a:r>
+              <a:rPr sz="1300" b="1">
+                <a:solidFill>
+                  <a:srgbClr val="FFFFFF"/>
+                </a:solidFill>
+                <a:latin typeface="Noto Looped Thai"/>
+              </a:rPr>
+              <a:t>17</a:t>
             </a:r>
           </a:p>
         </p:txBody>
@@ -11404,7 +12646,7 @@
                           </a:solidFill>
                           <a:latin typeface="Noto Looped Thai"/>
                         </a:rPr>
-                        <a:t>ข้อ 4: สมัครสมาชิกแล้วซิงก์ข้ามเครื่อง มีแต้มและกระดานอันดับ</a:t>
+                        <a:t>ข้อ 4: คะแนนแรงค์ตามความต่อเนื่อง ซิงก์ข้ามเครื่อง และกระดานอันดับ</a:t>
                       </a:r>
                     </a:p>
                   </a:txBody>
@@ -11556,7 +12798,7 @@
                 </a:solidFill>
                 <a:latin typeface="Noto Looped Thai"/>
               </a:rPr>
-              <a:t>“โครงงานพัฒนาได้ครบตามขอบเขตทั้ง 9 ฟังก์ชัน ผ่านชุดทดสอบอัตโนมัติ 105 กรณี สร้างไฟล์ติดตั้งจริงได้ และพัฒนาส่วนขยายออนไลน์เพิ่มเติมจนใช้งานได้ครบวงจร จึงถือว่าดำเนินงานสำเร็จ 100% ของขอบเขตที่กำหนด”</a:t>
+              <a:t>“โครงงานพัฒนาได้ครบตามขอบเขตทั้ง 9 ฟังก์ชัน ผ่านชุดทดสอบอัตโนมัติ 120 กรณี สร้างไฟล์ติดตั้งจริงได้ และพัฒนาส่วนขยายออนไลน์เพิ่มเติมจนใช้งานได้ครบวงจร จึงถือว่าดำเนินงานสำเร็จ 100% ของขอบเขตที่กำหนด”</a:t>
             </a:r>
           </a:p>
         </p:txBody>
@@ -11569,7 +12811,7 @@
 </p:sld>
 </file>
 
-<file path=ppt/slides/slide18.xml><?xml version="1.0" encoding="utf-8"?>
+<file path=ppt/slides/slide19.xml><?xml version="1.0" encoding="utf-8"?>
 <p:sld xmlns:a="http://schemas.openxmlformats.org/drawingml/2006/main" xmlns:p="http://schemas.openxmlformats.org/presentationml/2006/main" xmlns:r="http://schemas.openxmlformats.org/officeDocument/2006/relationships">
   <p:cSld>
     <p:spTree>
@@ -11847,7 +13089,7 @@
                 </a:solidFill>
                 <a:latin typeface="Noto Looped Thai"/>
               </a:rPr>
-              <a:t>Source code · ชุดทดสอบ 105 กรณี · ไฟล์ SQL ของเซิร์ฟเวอร์ เปิดตรวจได้</a:t>
+              <a:t>Source code · ชุดทดสอบ 120 กรณี · ไฟล์ SQL ของเซิร์ฟเวอร์ เปิดตรวจได้</a:t>
             </a:r>
           </a:p>
           <a:p>
@@ -14256,7 +15498,7 @@
                 </a:solidFill>
                 <a:latin typeface="Noto Looped Thai"/>
               </a:rPr>
-              <a:t>สมัครสมาชิกแล้วซิงก์ข้ามเครื่อง มีระบบแต้มและกระดานอันดับ</a:t>
+              <a:t>คะแนนแรงค์ตามความต่อเนื่อง 4 ด้าน ซิงก์ข้ามเครื่อง และกระดานอันดับ</a:t>
             </a:r>
           </a:p>
         </p:txBody>
@@ -14523,7 +15765,7 @@
                 </a:solidFill>
                 <a:latin typeface="Noto Looped Thai"/>
               </a:rPr>
-              <a:t>เกณฑ์: ฟังก์ชัน 9/9 + ออนไลน์ 4/4  |  flutter test 105/105  |  ใช้งานออฟไลน์  |  APK ติดตั้งได้</a:t>
+              <a:t>เกณฑ์: ฟังก์ชัน 9/9 + ออนไลน์ 4/4  |  flutter test 120/120  |  ใช้งานออฟไลน์  |  APK ติดตั้งได้</a:t>
             </a:r>
           </a:p>
         </p:txBody>
@@ -15180,7 +16422,7 @@
                           </a:solidFill>
                           <a:latin typeface="Noto Looped Thai"/>
                         </a:rPr>
-                        <a:t>3. เพิ่ม–แก้–ลบ habit + แม่แบบ 18 รายการ</a:t>
+                        <a:t>3. เพิ่ม–แก้–ลบ habit + แม่แบบ 16 รายการ</a:t>
                       </a:r>
                     </a:p>
                   </a:txBody>
@@ -15732,7 +16974,7 @@
                           </a:solidFill>
                           <a:latin typeface="Noto Looped Thai"/>
                         </a:rPr>
-                        <a:t>12 ไฟล์ · 105 กรณี ผ่านหมด</a:t>
+                        <a:t>14 ไฟล์ · 120 กรณี ผ่านหมด</a:t>
                       </a:r>
                     </a:p>
                   </a:txBody>
@@ -15927,7 +17169,7 @@
                           </a:solidFill>
                           <a:latin typeface="Noto Looped Thai"/>
                         </a:rPr>
-                        <a:t>12. ระบบแต้มและระดับ คิดที่เซิร์ฟเวอร์</a:t>
+                        <a:t>12. คะแนนแรงค์ 4 ด้าน + ตรา + popup</a:t>
                       </a:r>
                     </a:p>
                   </a:txBody>
@@ -15981,7 +17223,7 @@
                           </a:solidFill>
                           <a:latin typeface="Noto Looped Thai"/>
                         </a:rPr>
-                        <a:t>trigger apply_points</a:t>
+                        <a:t>score_calculator</a:t>
                       </a:r>
                     </a:p>
                   </a:txBody>
@@ -16010,7 +17252,7 @@
                           </a:solidFill>
                           <a:latin typeface="Noto Looped Thai"/>
                         </a:rPr>
-                        <a:t>13. กระดานอันดับ + แชมป์แต่ละด้าน</a:t>
+                        <a:t>13. อันดับรวม + เลือกดูแยกด้าน</a:t>
                       </a:r>
                     </a:p>
                   </a:txBody>
@@ -22145,7 +23387,7 @@
                 </a:solidFill>
                 <a:latin typeface="Noto Looped Thai"/>
               </a:rPr>
-              <a:t>ชุดทดสอบ 105 กรณี + ทดสอบหน้าจอจริง</a:t>
+              <a:t>ชุดทดสอบ 120 กรณี + ทดสอบหน้าจอจริง</a:t>
             </a:r>
           </a:p>
         </p:txBody>
@@ -22319,7 +23561,7 @@
                 </a:solidFill>
                 <a:latin typeface="Noto Looped Thai"/>
               </a:rPr>
-              <a:t>• โค้ดที่เขียนเอง 56 ไฟล์ Dart รวม 7,589 บรรทัด</a:t>
+              <a:t>• โค้ดที่เขียนเอง 60 ไฟล์ Dart รวม 8,804 บรรทัด</a:t>
             </a:r>
           </a:p>
           <a:p>
@@ -22338,7 +23580,7 @@
                 </a:solidFill>
                 <a:latin typeface="Noto Looped Thai"/>
               </a:rPr>
-              <a:t>• ชุดทดสอบ 12 ไฟล์ 1,500 บรรทัด รวม 105 กรณี</a:t>
+              <a:t>• ชุดทดสอบ 14 ไฟล์ 1,717 บรรทัด รวม 120 กรณี</a:t>
             </a:r>
           </a:p>
           <a:p>
@@ -22357,7 +23599,7 @@
                 </a:solidFill>
                 <a:latin typeface="Noto Looped Thai"/>
               </a:rPr>
-              <a:t>• 25 commit ตั้งแต่ 4 มิ.ย. – 22 ก.ย. 2569</a:t>
+              <a:t>• 32 commit ตั้งแต่ 4 มิ.ย. – 22 ก.ย. 2569</a:t>
             </a:r>
           </a:p>
           <a:p>
@@ -22414,7 +23656,7 @@
                 </a:solidFill>
                 <a:latin typeface="Noto Looped Thai"/>
               </a:rPr>
-              <a:t>• ไฟล์ติดตั้ง app-release.apk ขนาด 63.8 MB</a:t>
+              <a:t>• ไฟล์ติดตั้ง app-release.apk ขนาด 64.0 MB</a:t>
             </a:r>
           </a:p>
           <a:p>
@@ -23577,7 +24819,7 @@
                 </a:solidFill>
                 <a:latin typeface="Noto Looped Thai"/>
               </a:rPr>
-              <a:t>“ขอบเขตเดิม 9 ฟังก์ชันพัฒนาเสร็จครบ 100% ผ่านชุดทดสอบอัตโนมัติ 105 กรณี และพัฒนาส่วนขยายออนไลน์เพิ่มอีก 4 ฟังก์ชัน โดยทดสอบกับเซิร์ฟเวอร์จริงแล้วว่า สมัคร → ติ๊ก → ซิงก์ → ได้แต้ม → ขึ้นกระดานอันดับ ครบวงจร”</a:t>
+              <a:t>“ขอบเขตเดิม 9 ฟังก์ชันพัฒนาเสร็จครบ 100% ผ่านชุดทดสอบอัตโนมัติ 120 กรณี และพัฒนาส่วนขยายออนไลน์เพิ่มอีก 4 ฟังก์ชัน โดยทดสอบกับเซิร์ฟเวอร์จริงแล้วว่า สมัคร → ติ๊ก → ซิงก์ → ได้แต้ม → ขึ้นกระดานอันดับ ครบวงจร”</a:t>
             </a:r>
           </a:p>
         </p:txBody>
